--- a/course-materials/slides/ANOVA.pptx
+++ b/course-materials/slides/ANOVA.pptx
@@ -37,26 +37,27 @@
     <p:sldId id="282" r:id="rId32"/>
     <p:sldId id="283" r:id="rId33"/>
     <p:sldId id="284" r:id="rId34"/>
+    <p:sldId id="285" r:id="rId35"/>
   </p:sldIdLst>
   <p:sldSz cy="5143500" cx="9144000"/>
   <p:notesSz cx="6858000" cy="9144000"/>
   <p:embeddedFontLst>
     <p:embeddedFont>
       <p:font typeface="Nunito"/>
-      <p:regular r:id="rId35"/>
-      <p:bold r:id="rId36"/>
-      <p:italic r:id="rId37"/>
-      <p:boldItalic r:id="rId38"/>
+      <p:regular r:id="rId36"/>
+      <p:bold r:id="rId37"/>
+      <p:italic r:id="rId38"/>
+      <p:boldItalic r:id="rId39"/>
     </p:embeddedFont>
     <p:embeddedFont>
       <p:font typeface="Maven Pro"/>
-      <p:regular r:id="rId39"/>
-      <p:bold r:id="rId40"/>
+      <p:regular r:id="rId40"/>
+      <p:bold r:id="rId41"/>
     </p:embeddedFont>
     <p:embeddedFont>
       <p:font typeface="Oswald"/>
-      <p:regular r:id="rId41"/>
-      <p:bold r:id="rId42"/>
+      <p:regular r:id="rId42"/>
+      <p:bold r:id="rId43"/>
     </p:embeddedFont>
   </p:embeddedFontLst>
   <p:defaultTextStyle>
@@ -837,7 +838,7 @@
   <p:cSld>
     <p:spTree>
       <p:nvGrpSpPr>
-        <p:cNvPr id="358" name="Shape 358"/>
+        <p:cNvPr id="359" name="Shape 359"/>
         <p:cNvGrpSpPr/>
         <p:nvPr/>
       </p:nvGrpSpPr>
@@ -851,7 +852,7 @@
       </p:grpSpPr>
       <p:sp>
         <p:nvSpPr>
-          <p:cNvPr id="359" name="Google Shape;359;g2bf84c6ea02_0_0:notes"/>
+          <p:cNvPr id="360" name="Google Shape;360;g2bf84c6ea02_0_0:notes"/>
           <p:cNvSpPr/>
           <p:nvPr>
             <p:ph idx="2" type="sldImg"/>
@@ -886,7 +887,7 @@
       </p:sp>
       <p:sp>
         <p:nvSpPr>
-          <p:cNvPr id="360" name="Google Shape;360;g2bf84c6ea02_0_0:notes"/>
+          <p:cNvPr id="361" name="Google Shape;361;g2bf84c6ea02_0_0:notes"/>
           <p:cNvSpPr txBox="1"/>
           <p:nvPr>
             <p:ph idx="1" type="body"/>
@@ -936,7 +937,7 @@
   <p:cSld>
     <p:spTree>
       <p:nvGrpSpPr>
-        <p:cNvPr id="365" name="Shape 365"/>
+        <p:cNvPr id="366" name="Shape 366"/>
         <p:cNvGrpSpPr/>
         <p:nvPr/>
       </p:nvGrpSpPr>
@@ -950,7 +951,7 @@
       </p:grpSpPr>
       <p:sp>
         <p:nvSpPr>
-          <p:cNvPr id="366" name="Google Shape;366;g2bf84c6ea02_0_6:notes"/>
+          <p:cNvPr id="367" name="Google Shape;367;g2bf84c6ea02_0_6:notes"/>
           <p:cNvSpPr/>
           <p:nvPr>
             <p:ph idx="2" type="sldImg"/>
@@ -985,7 +986,7 @@
       </p:sp>
       <p:sp>
         <p:nvSpPr>
-          <p:cNvPr id="367" name="Google Shape;367;g2bf84c6ea02_0_6:notes"/>
+          <p:cNvPr id="368" name="Google Shape;368;g2bf84c6ea02_0_6:notes"/>
           <p:cNvSpPr txBox="1"/>
           <p:nvPr>
             <p:ph idx="1" type="body"/>
@@ -1035,7 +1036,7 @@
   <p:cSld>
     <p:spTree>
       <p:nvGrpSpPr>
-        <p:cNvPr id="372" name="Shape 372"/>
+        <p:cNvPr id="373" name="Shape 373"/>
         <p:cNvGrpSpPr/>
         <p:nvPr/>
       </p:nvGrpSpPr>
@@ -1049,7 +1050,7 @@
       </p:grpSpPr>
       <p:sp>
         <p:nvSpPr>
-          <p:cNvPr id="373" name="Google Shape;373;g2b8707c75e7_1_2:notes"/>
+          <p:cNvPr id="374" name="Google Shape;374;g2b8707c75e7_1_2:notes"/>
           <p:cNvSpPr/>
           <p:nvPr>
             <p:ph idx="2" type="sldImg"/>
@@ -1084,7 +1085,7 @@
       </p:sp>
       <p:sp>
         <p:nvSpPr>
-          <p:cNvPr id="374" name="Google Shape;374;g2b8707c75e7_1_2:notes"/>
+          <p:cNvPr id="375" name="Google Shape;375;g2b8707c75e7_1_2:notes"/>
           <p:cNvSpPr txBox="1"/>
           <p:nvPr>
             <p:ph idx="1" type="body"/>
@@ -1134,7 +1135,7 @@
   <p:cSld>
     <p:spTree>
       <p:nvGrpSpPr>
-        <p:cNvPr id="378" name="Shape 378"/>
+        <p:cNvPr id="379" name="Shape 379"/>
         <p:cNvGrpSpPr/>
         <p:nvPr/>
       </p:nvGrpSpPr>
@@ -1148,7 +1149,7 @@
       </p:grpSpPr>
       <p:sp>
         <p:nvSpPr>
-          <p:cNvPr id="379" name="Google Shape;379;g2b8707c75e7_1_7:notes"/>
+          <p:cNvPr id="380" name="Google Shape;380;g2b8707c75e7_1_7:notes"/>
           <p:cNvSpPr/>
           <p:nvPr>
             <p:ph idx="2" type="sldImg"/>
@@ -1183,7 +1184,7 @@
       </p:sp>
       <p:sp>
         <p:nvSpPr>
-          <p:cNvPr id="380" name="Google Shape;380;g2b8707c75e7_1_7:notes"/>
+          <p:cNvPr id="381" name="Google Shape;381;g2b8707c75e7_1_7:notes"/>
           <p:cNvSpPr txBox="1"/>
           <p:nvPr>
             <p:ph idx="1" type="body"/>
@@ -1233,7 +1234,7 @@
   <p:cSld>
     <p:spTree>
       <p:nvGrpSpPr>
-        <p:cNvPr id="398" name="Shape 398"/>
+        <p:cNvPr id="399" name="Shape 399"/>
         <p:cNvGrpSpPr/>
         <p:nvPr/>
       </p:nvGrpSpPr>
@@ -1247,7 +1248,7 @@
       </p:grpSpPr>
       <p:sp>
         <p:nvSpPr>
-          <p:cNvPr id="399" name="Google Shape;399;g2bf84c6ea02_0_14:notes"/>
+          <p:cNvPr id="400" name="Google Shape;400;g2bf84c6ea02_0_14:notes"/>
           <p:cNvSpPr/>
           <p:nvPr>
             <p:ph idx="2" type="sldImg"/>
@@ -1282,7 +1283,7 @@
       </p:sp>
       <p:sp>
         <p:nvSpPr>
-          <p:cNvPr id="400" name="Google Shape;400;g2bf84c6ea02_0_14:notes"/>
+          <p:cNvPr id="401" name="Google Shape;401;g2bf84c6ea02_0_14:notes"/>
           <p:cNvSpPr txBox="1"/>
           <p:nvPr>
             <p:ph idx="1" type="body"/>
@@ -1332,7 +1333,7 @@
   <p:cSld>
     <p:spTree>
       <p:nvGrpSpPr>
-        <p:cNvPr id="406" name="Shape 406"/>
+        <p:cNvPr id="407" name="Shape 407"/>
         <p:cNvGrpSpPr/>
         <p:nvPr/>
       </p:nvGrpSpPr>
@@ -1346,7 +1347,7 @@
       </p:grpSpPr>
       <p:sp>
         <p:nvSpPr>
-          <p:cNvPr id="407" name="Google Shape;407;g2fdc4af30cb_0_0:notes"/>
+          <p:cNvPr id="408" name="Google Shape;408;g2fdc4af30cb_0_0:notes"/>
           <p:cNvSpPr/>
           <p:nvPr>
             <p:ph idx="2" type="sldImg"/>
@@ -1381,7 +1382,7 @@
       </p:sp>
       <p:sp>
         <p:nvSpPr>
-          <p:cNvPr id="408" name="Google Shape;408;g2fdc4af30cb_0_0:notes"/>
+          <p:cNvPr id="409" name="Google Shape;409;g2fdc4af30cb_0_0:notes"/>
           <p:cNvSpPr txBox="1"/>
           <p:nvPr>
             <p:ph idx="1" type="body"/>
@@ -1431,7 +1432,7 @@
   <p:cSld>
     <p:spTree>
       <p:nvGrpSpPr>
-        <p:cNvPr id="414" name="Shape 414"/>
+        <p:cNvPr id="415" name="Shape 415"/>
         <p:cNvGrpSpPr/>
         <p:nvPr/>
       </p:nvGrpSpPr>
@@ -1445,7 +1446,7 @@
       </p:grpSpPr>
       <p:sp>
         <p:nvSpPr>
-          <p:cNvPr id="415" name="Google Shape;415;g33032354bd7_0_16:notes"/>
+          <p:cNvPr id="416" name="Google Shape;416;g33032354bd7_0_16:notes"/>
           <p:cNvSpPr/>
           <p:nvPr>
             <p:ph idx="2" type="sldImg"/>
@@ -1480,7 +1481,7 @@
       </p:sp>
       <p:sp>
         <p:nvSpPr>
-          <p:cNvPr id="416" name="Google Shape;416;g33032354bd7_0_16:notes"/>
+          <p:cNvPr id="417" name="Google Shape;417;g33032354bd7_0_16:notes"/>
           <p:cNvSpPr txBox="1"/>
           <p:nvPr>
             <p:ph idx="1" type="body"/>
@@ -1530,7 +1531,7 @@
   <p:cSld>
     <p:spTree>
       <p:nvGrpSpPr>
-        <p:cNvPr id="423" name="Shape 423"/>
+        <p:cNvPr id="424" name="Shape 424"/>
         <p:cNvGrpSpPr/>
         <p:nvPr/>
       </p:nvGrpSpPr>
@@ -1544,7 +1545,7 @@
       </p:grpSpPr>
       <p:sp>
         <p:nvSpPr>
-          <p:cNvPr id="424" name="Google Shape;424;g33032354bd7_0_25:notes"/>
+          <p:cNvPr id="425" name="Google Shape;425;g33032354bd7_0_25:notes"/>
           <p:cNvSpPr/>
           <p:nvPr>
             <p:ph idx="2" type="sldImg"/>
@@ -1579,7 +1580,7 @@
       </p:sp>
       <p:sp>
         <p:nvSpPr>
-          <p:cNvPr id="425" name="Google Shape;425;g33032354bd7_0_25:notes"/>
+          <p:cNvPr id="426" name="Google Shape;426;g33032354bd7_0_25:notes"/>
           <p:cNvSpPr txBox="1"/>
           <p:nvPr>
             <p:ph idx="1" type="body"/>
@@ -1629,7 +1630,7 @@
   <p:cSld>
     <p:spTree>
       <p:nvGrpSpPr>
-        <p:cNvPr id="432" name="Shape 432"/>
+        <p:cNvPr id="433" name="Shape 433"/>
         <p:cNvGrpSpPr/>
         <p:nvPr/>
       </p:nvGrpSpPr>
@@ -1643,7 +1644,7 @@
       </p:grpSpPr>
       <p:sp>
         <p:nvSpPr>
-          <p:cNvPr id="433" name="Google Shape;433;g3cf0d0d6d5a_0_12:notes"/>
+          <p:cNvPr id="434" name="Google Shape;434;g3cf0d0d6d5a_0_12:notes"/>
           <p:cNvSpPr/>
           <p:nvPr>
             <p:ph idx="2" type="sldImg"/>
@@ -1678,7 +1679,7 @@
       </p:sp>
       <p:sp>
         <p:nvSpPr>
-          <p:cNvPr id="434" name="Google Shape;434;g3cf0d0d6d5a_0_12:notes"/>
+          <p:cNvPr id="435" name="Google Shape;435;g3cf0d0d6d5a_0_12:notes"/>
           <p:cNvSpPr txBox="1"/>
           <p:nvPr>
             <p:ph idx="1" type="body"/>
@@ -1728,7 +1729,7 @@
   <p:cSld>
     <p:spTree>
       <p:nvGrpSpPr>
-        <p:cNvPr id="438" name="Shape 438"/>
+        <p:cNvPr id="439" name="Shape 439"/>
         <p:cNvGrpSpPr/>
         <p:nvPr/>
       </p:nvGrpSpPr>
@@ -1742,7 +1743,7 @@
       </p:grpSpPr>
       <p:sp>
         <p:nvSpPr>
-          <p:cNvPr id="439" name="Google Shape;439;g2fdc4af30cb_0_7:notes"/>
+          <p:cNvPr id="440" name="Google Shape;440;g2fdc4af30cb_0_7:notes"/>
           <p:cNvSpPr/>
           <p:nvPr>
             <p:ph idx="2" type="sldImg"/>
@@ -1777,7 +1778,7 @@
       </p:sp>
       <p:sp>
         <p:nvSpPr>
-          <p:cNvPr id="440" name="Google Shape;440;g2fdc4af30cb_0_7:notes"/>
+          <p:cNvPr id="441" name="Google Shape;441;g2fdc4af30cb_0_7:notes"/>
           <p:cNvSpPr txBox="1"/>
           <p:nvPr>
             <p:ph idx="1" type="body"/>
@@ -1926,7 +1927,7 @@
   <p:cSld>
     <p:spTree>
       <p:nvGrpSpPr>
-        <p:cNvPr id="448" name="Shape 448"/>
+        <p:cNvPr id="449" name="Shape 449"/>
         <p:cNvGrpSpPr/>
         <p:nvPr/>
       </p:nvGrpSpPr>
@@ -1940,7 +1941,7 @@
       </p:grpSpPr>
       <p:sp>
         <p:nvSpPr>
-          <p:cNvPr id="449" name="Google Shape;449;g3cf0d0d6d5a_0_35:notes"/>
+          <p:cNvPr id="450" name="Google Shape;450;g3cf0d0d6d5a_0_35:notes"/>
           <p:cNvSpPr/>
           <p:nvPr>
             <p:ph idx="2" type="sldImg"/>
@@ -1975,7 +1976,7 @@
       </p:sp>
       <p:sp>
         <p:nvSpPr>
-          <p:cNvPr id="450" name="Google Shape;450;g3cf0d0d6d5a_0_35:notes"/>
+          <p:cNvPr id="451" name="Google Shape;451;g3cf0d0d6d5a_0_35:notes"/>
           <p:cNvSpPr txBox="1"/>
           <p:nvPr>
             <p:ph idx="1" type="body"/>
@@ -2025,7 +2026,7 @@
   <p:cSld>
     <p:spTree>
       <p:nvGrpSpPr>
-        <p:cNvPr id="454" name="Shape 454"/>
+        <p:cNvPr id="455" name="Shape 455"/>
         <p:cNvGrpSpPr/>
         <p:nvPr/>
       </p:nvGrpSpPr>
@@ -2039,7 +2040,7 @@
       </p:grpSpPr>
       <p:sp>
         <p:nvSpPr>
-          <p:cNvPr id="455" name="Google Shape;455;g3cf0d0d6d5a_0_17:notes"/>
+          <p:cNvPr id="456" name="Google Shape;456;g3cf0d0d6d5a_0_17:notes"/>
           <p:cNvSpPr/>
           <p:nvPr>
             <p:ph idx="2" type="sldImg"/>
@@ -2074,7 +2075,7 @@
       </p:sp>
       <p:sp>
         <p:nvSpPr>
-          <p:cNvPr id="456" name="Google Shape;456;g3cf0d0d6d5a_0_17:notes"/>
+          <p:cNvPr id="457" name="Google Shape;457;g3cf0d0d6d5a_0_17:notes"/>
           <p:cNvSpPr txBox="1"/>
           <p:nvPr>
             <p:ph idx="1" type="body"/>
@@ -2124,7 +2125,7 @@
   <p:cSld>
     <p:spTree>
       <p:nvGrpSpPr>
-        <p:cNvPr id="461" name="Shape 461"/>
+        <p:cNvPr id="462" name="Shape 462"/>
         <p:cNvGrpSpPr/>
         <p:nvPr/>
       </p:nvGrpSpPr>
@@ -2138,7 +2139,7 @@
       </p:grpSpPr>
       <p:sp>
         <p:nvSpPr>
-          <p:cNvPr id="462" name="Google Shape;462;g3cf0d0d6d5a_0_27:notes"/>
+          <p:cNvPr id="463" name="Google Shape;463;g3cf0d0d6d5a_0_27:notes"/>
           <p:cNvSpPr/>
           <p:nvPr>
             <p:ph idx="2" type="sldImg"/>
@@ -2173,7 +2174,7 @@
       </p:sp>
       <p:sp>
         <p:nvSpPr>
-          <p:cNvPr id="463" name="Google Shape;463;g3cf0d0d6d5a_0_27:notes"/>
+          <p:cNvPr id="464" name="Google Shape;464;g3cf0d0d6d5a_0_27:notes"/>
           <p:cNvSpPr txBox="1"/>
           <p:nvPr>
             <p:ph idx="1" type="body"/>
@@ -2223,7 +2224,7 @@
   <p:cSld>
     <p:spTree>
       <p:nvGrpSpPr>
-        <p:cNvPr id="468" name="Shape 468"/>
+        <p:cNvPr id="469" name="Shape 469"/>
         <p:cNvGrpSpPr/>
         <p:nvPr/>
       </p:nvGrpSpPr>
@@ -2237,7 +2238,7 @@
       </p:grpSpPr>
       <p:sp>
         <p:nvSpPr>
-          <p:cNvPr id="469" name="Google Shape;469;g2fdc4af30cb_0_20:notes"/>
+          <p:cNvPr id="470" name="Google Shape;470;g2fdc4af30cb_0_20:notes"/>
           <p:cNvSpPr/>
           <p:nvPr>
             <p:ph idx="2" type="sldImg"/>
@@ -2272,7 +2273,7 @@
       </p:sp>
       <p:sp>
         <p:nvSpPr>
-          <p:cNvPr id="470" name="Google Shape;470;g2fdc4af30cb_0_20:notes"/>
+          <p:cNvPr id="471" name="Google Shape;471;g2fdc4af30cb_0_20:notes"/>
           <p:cNvSpPr txBox="1"/>
           <p:nvPr>
             <p:ph idx="1" type="body"/>
@@ -2322,7 +2323,7 @@
   <p:cSld>
     <p:spTree>
       <p:nvGrpSpPr>
-        <p:cNvPr id="476" name="Shape 476"/>
+        <p:cNvPr id="477" name="Shape 477"/>
         <p:cNvGrpSpPr/>
         <p:nvPr/>
       </p:nvGrpSpPr>
@@ -2336,7 +2337,7 @@
       </p:grpSpPr>
       <p:sp>
         <p:nvSpPr>
-          <p:cNvPr id="477" name="Google Shape;477;g2fdc4af30cb_0_13:notes"/>
+          <p:cNvPr id="478" name="Google Shape;478;g2fdc4af30cb_0_13:notes"/>
           <p:cNvSpPr/>
           <p:nvPr>
             <p:ph idx="2" type="sldImg"/>
@@ -2371,7 +2372,7 @@
       </p:sp>
       <p:sp>
         <p:nvSpPr>
-          <p:cNvPr id="478" name="Google Shape;478;g2fdc4af30cb_0_13:notes"/>
+          <p:cNvPr id="479" name="Google Shape;479;g2fdc4af30cb_0_13:notes"/>
           <p:cNvSpPr txBox="1"/>
           <p:nvPr>
             <p:ph idx="1" type="body"/>
@@ -2421,7 +2422,7 @@
   <p:cSld>
     <p:spTree>
       <p:nvGrpSpPr>
-        <p:cNvPr id="484" name="Shape 484"/>
+        <p:cNvPr id="485" name="Shape 485"/>
         <p:cNvGrpSpPr/>
         <p:nvPr/>
       </p:nvGrpSpPr>
@@ -2435,7 +2436,7 @@
       </p:grpSpPr>
       <p:sp>
         <p:nvSpPr>
-          <p:cNvPr id="485" name="Google Shape;485;g3cf0d0d6d5a_0_4:notes"/>
+          <p:cNvPr id="486" name="Google Shape;486;g3cf0d0d6d5a_0_4:notes"/>
           <p:cNvSpPr/>
           <p:nvPr>
             <p:ph idx="2" type="sldImg"/>
@@ -2470,7 +2471,7 @@
       </p:sp>
       <p:sp>
         <p:nvSpPr>
-          <p:cNvPr id="486" name="Google Shape;486;g3cf0d0d6d5a_0_4:notes"/>
+          <p:cNvPr id="487" name="Google Shape;487;g3cf0d0d6d5a_0_4:notes"/>
           <p:cNvSpPr txBox="1"/>
           <p:nvPr>
             <p:ph idx="1" type="body"/>
@@ -2520,7 +2521,7 @@
   <p:cSld>
     <p:spTree>
       <p:nvGrpSpPr>
-        <p:cNvPr id="493" name="Shape 493"/>
+        <p:cNvPr id="494" name="Shape 494"/>
         <p:cNvGrpSpPr/>
         <p:nvPr/>
       </p:nvGrpSpPr>
@@ -2534,7 +2535,7 @@
       </p:grpSpPr>
       <p:sp>
         <p:nvSpPr>
-          <p:cNvPr id="494" name="Google Shape;494;g3cf0d0d6d5a_0_40:notes"/>
+          <p:cNvPr id="495" name="Google Shape;495;g3cf0d0d6d5a_0_40:notes"/>
           <p:cNvSpPr/>
           <p:nvPr>
             <p:ph idx="2" type="sldImg"/>
@@ -2569,7 +2570,7 @@
       </p:sp>
       <p:sp>
         <p:nvSpPr>
-          <p:cNvPr id="495" name="Google Shape;495;g3cf0d0d6d5a_0_40:notes"/>
+          <p:cNvPr id="496" name="Google Shape;496;g3cf0d0d6d5a_0_40:notes"/>
           <p:cNvSpPr txBox="1"/>
           <p:nvPr>
             <p:ph idx="1" type="body"/>
@@ -2619,7 +2620,7 @@
   <p:cSld>
     <p:spTree>
       <p:nvGrpSpPr>
-        <p:cNvPr id="500" name="Shape 500"/>
+        <p:cNvPr id="501" name="Shape 501"/>
         <p:cNvGrpSpPr/>
         <p:nvPr/>
       </p:nvGrpSpPr>
@@ -2633,7 +2634,7 @@
       </p:grpSpPr>
       <p:sp>
         <p:nvSpPr>
-          <p:cNvPr id="501" name="Google Shape;501;g2fdde5d87d2_0_6:notes"/>
+          <p:cNvPr id="502" name="Google Shape;502;g2fdde5d87d2_0_6:notes"/>
           <p:cNvSpPr/>
           <p:nvPr>
             <p:ph idx="2" type="sldImg"/>
@@ -2668,7 +2669,7 @@
       </p:sp>
       <p:sp>
         <p:nvSpPr>
-          <p:cNvPr id="502" name="Google Shape;502;g2fdde5d87d2_0_6:notes"/>
+          <p:cNvPr id="503" name="Google Shape;503;g2fdde5d87d2_0_6:notes"/>
           <p:cNvSpPr txBox="1"/>
           <p:nvPr>
             <p:ph idx="1" type="body"/>
@@ -2718,7 +2719,7 @@
   <p:cSld>
     <p:spTree>
       <p:nvGrpSpPr>
-        <p:cNvPr id="506" name="Shape 506"/>
+        <p:cNvPr id="507" name="Shape 507"/>
         <p:cNvGrpSpPr/>
         <p:nvPr/>
       </p:nvGrpSpPr>
@@ -2732,7 +2733,7 @@
       </p:grpSpPr>
       <p:sp>
         <p:nvSpPr>
-          <p:cNvPr id="507" name="Google Shape;507;g3cf0d0d6d5a_0_51:notes"/>
+          <p:cNvPr id="508" name="Google Shape;508;g3cf0d0d6d5a_0_51:notes"/>
           <p:cNvSpPr/>
           <p:nvPr>
             <p:ph idx="2" type="sldImg"/>
@@ -2767,7 +2768,7 @@
       </p:sp>
       <p:sp>
         <p:nvSpPr>
-          <p:cNvPr id="508" name="Google Shape;508;g3cf0d0d6d5a_0_51:notes"/>
+          <p:cNvPr id="509" name="Google Shape;509;g3cf0d0d6d5a_0_51:notes"/>
           <p:cNvSpPr txBox="1"/>
           <p:nvPr>
             <p:ph idx="1" type="body"/>
@@ -2817,7 +2818,7 @@
   <p:cSld>
     <p:spTree>
       <p:nvGrpSpPr>
-        <p:cNvPr id="512" name="Shape 512"/>
+        <p:cNvPr id="513" name="Shape 513"/>
         <p:cNvGrpSpPr/>
         <p:nvPr/>
       </p:nvGrpSpPr>
@@ -2831,7 +2832,7 @@
       </p:grpSpPr>
       <p:sp>
         <p:nvSpPr>
-          <p:cNvPr id="513" name="Google Shape;513;g3cf0d0d6d5a_0_61:notes"/>
+          <p:cNvPr id="514" name="Google Shape;514;g3cf0d0d6d5a_0_61:notes"/>
           <p:cNvSpPr/>
           <p:nvPr>
             <p:ph idx="2" type="sldImg"/>
@@ -2866,7 +2867,7 @@
       </p:sp>
       <p:sp>
         <p:nvSpPr>
-          <p:cNvPr id="514" name="Google Shape;514;g3cf0d0d6d5a_0_61:notes"/>
+          <p:cNvPr id="515" name="Google Shape;515;g3cf0d0d6d5a_0_61:notes"/>
           <p:cNvSpPr txBox="1"/>
           <p:nvPr>
             <p:ph idx="1" type="body"/>
@@ -3010,6 +3011,105 @@
 </p:notes>
 </file>
 
+<file path=ppt/notesSlides/notesSlide30.xml><?xml version="1.0" encoding="utf-8"?>
+<p:notes xmlns:a="http://schemas.openxmlformats.org/drawingml/2006/main" xmlns:r="http://schemas.openxmlformats.org/officeDocument/2006/relationships" xmlns:mc="http://schemas.openxmlformats.org/markup-compatibility/2006" xmlns:mv="urn:schemas-microsoft-com:mac:vml" xmlns:p="http://schemas.openxmlformats.org/presentationml/2006/main" xmlns:c="http://schemas.openxmlformats.org/drawingml/2006/chart" xmlns:dgm="http://schemas.openxmlformats.org/drawingml/2006/diagram" xmlns:o="urn:schemas-microsoft-com:office:office" xmlns:v="urn:schemas-microsoft-com:vml" xmlns:pvml="urn:schemas-microsoft-com:office:powerpoint" xmlns:com="http://schemas.openxmlformats.org/drawingml/2006/compatibility" xmlns:p14="http://schemas.microsoft.com/office/powerpoint/2010/main" xmlns:p15="http://schemas.microsoft.com/office/powerpoint/2012/main" xmlns:ahyp="http://schemas.microsoft.com/office/drawing/2018/hyperlinkcolor" showMasterPhAnim="0" showMasterSp="0">
+  <p:cSld>
+    <p:spTree>
+      <p:nvGrpSpPr>
+        <p:cNvPr id="519" name="Shape 519"/>
+        <p:cNvGrpSpPr/>
+        <p:nvPr/>
+      </p:nvGrpSpPr>
+      <p:grpSpPr>
+        <a:xfrm>
+          <a:off x="0" y="0"/>
+          <a:ext cx="0" cy="0"/>
+          <a:chOff x="0" y="0"/>
+          <a:chExt cx="0" cy="0"/>
+        </a:xfrm>
+      </p:grpSpPr>
+      <p:sp>
+        <p:nvSpPr>
+          <p:cNvPr id="520" name="Google Shape;520;g3d01a68038d_0_1:notes"/>
+          <p:cNvSpPr/>
+          <p:nvPr>
+            <p:ph idx="2" type="sldImg"/>
+          </p:nvPr>
+        </p:nvSpPr>
+        <p:spPr>
+          <a:xfrm>
+            <a:off x="381300" y="685800"/>
+            <a:ext cx="6096000" cy="3429000"/>
+          </a:xfrm>
+          <a:custGeom>
+            <a:rect b="b" l="l" r="r" t="t"/>
+            <a:pathLst>
+              <a:path extrusionOk="0" h="120000" w="120000">
+                <a:moveTo>
+                  <a:pt x="0" y="0"/>
+                </a:moveTo>
+                <a:lnTo>
+                  <a:pt x="120000" y="0"/>
+                </a:lnTo>
+                <a:lnTo>
+                  <a:pt x="120000" y="120000"/>
+                </a:lnTo>
+                <a:lnTo>
+                  <a:pt x="0" y="120000"/>
+                </a:lnTo>
+                <a:close/>
+              </a:path>
+            </a:pathLst>
+          </a:custGeom>
+        </p:spPr>
+      </p:sp>
+      <p:sp>
+        <p:nvSpPr>
+          <p:cNvPr id="521" name="Google Shape;521;g3d01a68038d_0_1:notes"/>
+          <p:cNvSpPr txBox="1"/>
+          <p:nvPr>
+            <p:ph idx="1" type="body"/>
+          </p:nvPr>
+        </p:nvSpPr>
+        <p:spPr>
+          <a:xfrm>
+            <a:off x="685800" y="4343400"/>
+            <a:ext cx="5486400" cy="4114800"/>
+          </a:xfrm>
+          <a:prstGeom prst="rect">
+            <a:avLst/>
+          </a:prstGeom>
+        </p:spPr>
+        <p:txBody>
+          <a:bodyPr anchorCtr="0" anchor="t" bIns="91425" lIns="91425" spcFirstLastPara="1" rIns="91425" wrap="square" tIns="91425">
+            <a:noAutofit/>
+          </a:bodyPr>
+          <a:lstStyle/>
+          <a:p>
+            <a:pPr indent="0" lvl="0" marL="0" rtl="0" algn="l">
+              <a:spcBef>
+                <a:spcPts val="0"/>
+              </a:spcBef>
+              <a:spcAft>
+                <a:spcPts val="0"/>
+              </a:spcAft>
+              <a:buNone/>
+            </a:pPr>
+            <a:r>
+              <a:t/>
+            </a:r>
+            <a:endParaRPr/>
+          </a:p>
+        </p:txBody>
+      </p:sp>
+    </p:spTree>
+  </p:cSld>
+  <p:clrMapOvr>
+    <a:masterClrMapping/>
+  </p:clrMapOvr>
+</p:notes>
+</file>
+
 <file path=ppt/notesSlides/notesSlide4.xml><?xml version="1.0" encoding="utf-8"?>
 <p:notes xmlns:a="http://schemas.openxmlformats.org/drawingml/2006/main" xmlns:r="http://schemas.openxmlformats.org/officeDocument/2006/relationships" xmlns:mc="http://schemas.openxmlformats.org/markup-compatibility/2006" xmlns:mv="urn:schemas-microsoft-com:mac:vml" xmlns:p="http://schemas.openxmlformats.org/presentationml/2006/main" xmlns:c="http://schemas.openxmlformats.org/drawingml/2006/chart" xmlns:dgm="http://schemas.openxmlformats.org/drawingml/2006/diagram" xmlns:o="urn:schemas-microsoft-com:office:office" xmlns:v="urn:schemas-microsoft-com:vml" xmlns:pvml="urn:schemas-microsoft-com:office:powerpoint" xmlns:com="http://schemas.openxmlformats.org/drawingml/2006/compatibility" xmlns:p14="http://schemas.microsoft.com/office/powerpoint/2010/main" xmlns:p15="http://schemas.microsoft.com/office/powerpoint/2012/main" xmlns:ahyp="http://schemas.microsoft.com/office/drawing/2018/hyperlinkcolor" showMasterPhAnim="0" showMasterSp="0">
   <p:cSld>
@@ -3411,7 +3511,7 @@
   <p:cSld>
     <p:spTree>
       <p:nvGrpSpPr>
-        <p:cNvPr id="321" name="Shape 321"/>
+        <p:cNvPr id="322" name="Shape 322"/>
         <p:cNvGrpSpPr/>
         <p:nvPr/>
       </p:nvGrpSpPr>
@@ -3425,7 +3525,7 @@
       </p:grpSpPr>
       <p:sp>
         <p:nvSpPr>
-          <p:cNvPr id="322" name="Google Shape;322;g2b8707c75e7_0_16:notes"/>
+          <p:cNvPr id="323" name="Google Shape;323;g2b8707c75e7_0_16:notes"/>
           <p:cNvSpPr/>
           <p:nvPr>
             <p:ph idx="2" type="sldImg"/>
@@ -3460,7 +3560,7 @@
       </p:sp>
       <p:sp>
         <p:nvSpPr>
-          <p:cNvPr id="323" name="Google Shape;323;g2b8707c75e7_0_16:notes"/>
+          <p:cNvPr id="324" name="Google Shape;324;g2b8707c75e7_0_16:notes"/>
           <p:cNvSpPr txBox="1"/>
           <p:nvPr>
             <p:ph idx="1" type="body"/>
@@ -3510,7 +3610,7 @@
   <p:cSld>
     <p:spTree>
       <p:nvGrpSpPr>
-        <p:cNvPr id="350" name="Shape 350"/>
+        <p:cNvPr id="351" name="Shape 351"/>
         <p:cNvGrpSpPr/>
         <p:nvPr/>
       </p:nvGrpSpPr>
@@ -3524,7 +3624,7 @@
       </p:grpSpPr>
       <p:sp>
         <p:nvSpPr>
-          <p:cNvPr id="351" name="Google Shape;351;g2b8707c75e7_0_44:notes"/>
+          <p:cNvPr id="352" name="Google Shape;352;g2b8707c75e7_0_44:notes"/>
           <p:cNvSpPr/>
           <p:nvPr>
             <p:ph idx="2" type="sldImg"/>
@@ -3559,7 +3659,7 @@
       </p:sp>
       <p:sp>
         <p:nvSpPr>
-          <p:cNvPr id="352" name="Google Shape;352;g2b8707c75e7_0_44:notes"/>
+          <p:cNvPr id="353" name="Google Shape;353;g2b8707c75e7_0_44:notes"/>
           <p:cNvSpPr txBox="1"/>
           <p:nvPr>
             <p:ph idx="1" type="body"/>
@@ -17951,7 +18051,7 @@
         </p:spPr>
         <p:txBody>
           <a:bodyPr anchorCtr="0" anchor="t" bIns="91425" lIns="91425" spcFirstLastPara="1" rIns="91425" wrap="square" tIns="91425">
-            <a:normAutofit/>
+            <a:normAutofit fontScale="85000" lnSpcReduction="20000"/>
           </a:bodyPr>
           <a:lstStyle/>
           <a:p>
@@ -17982,7 +18082,7 @@
             </a:pPr>
             <a:r>
               <a:rPr lang="en"/>
-              <a:t>Testing Three or More Population Means</a:t>
+              <a:t>Testing Differences  invThree or More Population Means</a:t>
             </a:r>
             <a:endParaRPr/>
           </a:p>
@@ -18001,7 +18101,7 @@
   <p:cSld>
     <p:spTree>
       <p:nvGrpSpPr>
-        <p:cNvPr id="361" name="Shape 361"/>
+        <p:cNvPr id="362" name="Shape 362"/>
         <p:cNvGrpSpPr/>
         <p:nvPr/>
       </p:nvGrpSpPr>
@@ -18015,7 +18115,7 @@
       </p:grpSpPr>
       <p:sp>
         <p:nvSpPr>
-          <p:cNvPr id="362" name="Google Shape;362;p22"/>
+          <p:cNvPr id="363" name="Google Shape;363;p22"/>
           <p:cNvSpPr txBox="1"/>
           <p:nvPr>
             <p:ph type="title"/>
@@ -18055,7 +18155,7 @@
       </p:sp>
       <p:sp>
         <p:nvSpPr>
-          <p:cNvPr id="363" name="Google Shape;363;p22"/>
+          <p:cNvPr id="364" name="Google Shape;364;p22"/>
           <p:cNvSpPr txBox="1"/>
           <p:nvPr>
             <p:ph idx="1" type="body"/>
@@ -18173,7 +18273,7 @@
             </a:pPr>
             <a:r>
               <a:rPr lang="en" sz="1700"/>
-              <a:t>Calculate each observation’s difference from it’s group mean</a:t>
+              <a:t>Calculate each observation’s difference from its group mean</a:t>
             </a:r>
             <a:endParaRPr sz="1700"/>
           </a:p>
@@ -18215,7 +18315,7 @@
       </p:sp>
       <p:pic>
         <p:nvPicPr>
-          <p:cNvPr id="364" name="Google Shape;364;p22"/>
+          <p:cNvPr id="365" name="Google Shape;365;p22"/>
           <p:cNvPicPr preferRelativeResize="0"/>
           <p:nvPr/>
         </p:nvPicPr>
@@ -18280,7 +18380,7 @@
                                           </p:stCondLst>
                                         </p:cTn>
                                         <p:tgtEl>
-                                          <p:spTgt spid="363">
+                                          <p:spTgt spid="364">
                                             <p:txEl>
                                               <p:pRg end="0" st="0"/>
                                             </p:txEl>
@@ -18329,7 +18429,7 @@
                                           </p:stCondLst>
                                         </p:cTn>
                                         <p:tgtEl>
-                                          <p:spTgt spid="363">
+                                          <p:spTgt spid="364">
                                             <p:txEl>
                                               <p:pRg end="1" st="1"/>
                                             </p:txEl>
@@ -18378,7 +18478,7 @@
                                           </p:stCondLst>
                                         </p:cTn>
                                         <p:tgtEl>
-                                          <p:spTgt spid="363">
+                                          <p:spTgt spid="364">
                                             <p:txEl>
                                               <p:pRg end="2" st="2"/>
                                             </p:txEl>
@@ -18427,7 +18527,7 @@
                                           </p:stCondLst>
                                         </p:cTn>
                                         <p:tgtEl>
-                                          <p:spTgt spid="363">
+                                          <p:spTgt spid="364">
                                             <p:txEl>
                                               <p:pRg end="3" st="3"/>
                                             </p:txEl>
@@ -18476,7 +18576,7 @@
                                           </p:stCondLst>
                                         </p:cTn>
                                         <p:tgtEl>
-                                          <p:spTgt spid="363">
+                                          <p:spTgt spid="364">
                                             <p:txEl>
                                               <p:pRg end="4" st="4"/>
                                             </p:txEl>
@@ -18525,7 +18625,7 @@
                                           </p:stCondLst>
                                         </p:cTn>
                                         <p:tgtEl>
-                                          <p:spTgt spid="363">
+                                          <p:spTgt spid="364">
                                             <p:txEl>
                                               <p:pRg end="5" st="5"/>
                                             </p:txEl>
@@ -18574,7 +18674,7 @@
                                           </p:stCondLst>
                                         </p:cTn>
                                         <p:tgtEl>
-                                          <p:spTgt spid="363">
+                                          <p:spTgt spid="364">
                                             <p:txEl>
                                               <p:pRg end="6" st="6"/>
                                             </p:txEl>
@@ -18623,7 +18723,7 @@
                                           </p:stCondLst>
                                         </p:cTn>
                                         <p:tgtEl>
-                                          <p:spTgt spid="363">
+                                          <p:spTgt spid="364">
                                             <p:txEl>
                                               <p:pRg end="7" st="7"/>
                                             </p:txEl>
@@ -18676,7 +18776,7 @@
   <p:cSld>
     <p:spTree>
       <p:nvGrpSpPr>
-        <p:cNvPr id="368" name="Shape 368"/>
+        <p:cNvPr id="369" name="Shape 369"/>
         <p:cNvGrpSpPr/>
         <p:nvPr/>
       </p:nvGrpSpPr>
@@ -18690,7 +18790,7 @@
       </p:grpSpPr>
       <p:sp>
         <p:nvSpPr>
-          <p:cNvPr id="369" name="Google Shape;369;p23"/>
+          <p:cNvPr id="370" name="Google Shape;370;p23"/>
           <p:cNvSpPr txBox="1"/>
           <p:nvPr>
             <p:ph type="title"/>
@@ -18730,7 +18830,7 @@
       </p:sp>
       <p:sp>
         <p:nvSpPr>
-          <p:cNvPr id="370" name="Google Shape;370;p23"/>
+          <p:cNvPr id="371" name="Google Shape;371;p23"/>
           <p:cNvSpPr txBox="1"/>
           <p:nvPr>
             <p:ph idx="1" type="body"/>
@@ -18738,7 +18838,7 @@
         </p:nvSpPr>
         <p:spPr>
           <a:xfrm>
-            <a:off x="1303800" y="1429475"/>
+            <a:off x="1303800" y="1170100"/>
             <a:ext cx="7030500" cy="2541600"/>
           </a:xfrm>
           <a:prstGeom prst="rect">
@@ -18747,7 +18847,7 @@
         </p:spPr>
         <p:txBody>
           <a:bodyPr anchorCtr="0" anchor="t" bIns="91425" lIns="91425" spcFirstLastPara="1" rIns="91425" wrap="square" tIns="91425">
-            <a:normAutofit lnSpcReduction="10000"/>
+            <a:normAutofit fontScale="92500" lnSpcReduction="20000"/>
           </a:bodyPr>
           <a:lstStyle/>
           <a:p>
@@ -18783,14 +18883,14 @@
             <a:endParaRPr sz="1500"/>
           </a:p>
           <a:p>
-            <a:pPr indent="-323850" lvl="0" marL="457200" rtl="0" algn="l">
+            <a:pPr indent="-316706" lvl="0" marL="457200" rtl="0" algn="l">
               <a:spcBef>
                 <a:spcPts val="1200"/>
               </a:spcBef>
               <a:spcAft>
                 <a:spcPts val="0"/>
               </a:spcAft>
-              <a:buSzPts val="1500"/>
+              <a:buSzPct val="100000"/>
               <a:buAutoNum type="arabicParenR"/>
             </a:pPr>
             <a:r>
@@ -18800,14 +18900,14 @@
             <a:endParaRPr sz="1500"/>
           </a:p>
           <a:p>
-            <a:pPr indent="-323850" lvl="0" marL="457200" rtl="0" algn="l">
-              <a:spcBef>
-                <a:spcPts val="0"/>
-              </a:spcBef>
-              <a:spcAft>
-                <a:spcPts val="0"/>
-              </a:spcAft>
-              <a:buSzPts val="1500"/>
+            <a:pPr indent="-316706" lvl="0" marL="457200" rtl="0" algn="l">
+              <a:spcBef>
+                <a:spcPts val="0"/>
+              </a:spcBef>
+              <a:spcAft>
+                <a:spcPts val="0"/>
+              </a:spcAft>
+              <a:buSzPct val="100000"/>
               <a:buAutoNum type="arabicParenR"/>
             </a:pPr>
             <a:r>
@@ -18817,14 +18917,14 @@
             <a:endParaRPr sz="1500"/>
           </a:p>
           <a:p>
-            <a:pPr indent="-323850" lvl="0" marL="457200" rtl="0" algn="l">
-              <a:spcBef>
-                <a:spcPts val="0"/>
-              </a:spcBef>
-              <a:spcAft>
-                <a:spcPts val="0"/>
-              </a:spcAft>
-              <a:buSzPts val="1500"/>
+            <a:pPr indent="-316706" lvl="0" marL="457200" rtl="0" algn="l">
+              <a:spcBef>
+                <a:spcPts val="0"/>
+              </a:spcBef>
+              <a:spcAft>
+                <a:spcPts val="0"/>
+              </a:spcAft>
+              <a:buSzPct val="100000"/>
               <a:buAutoNum type="arabicParenR"/>
             </a:pPr>
             <a:r>
@@ -18834,14 +18934,14 @@
             <a:endParaRPr sz="1500"/>
           </a:p>
           <a:p>
-            <a:pPr indent="-323850" lvl="0" marL="457200" rtl="0" algn="l">
-              <a:spcBef>
-                <a:spcPts val="0"/>
-              </a:spcBef>
-              <a:spcAft>
-                <a:spcPts val="0"/>
-              </a:spcAft>
-              <a:buSzPts val="1500"/>
+            <a:pPr indent="-316706" lvl="0" marL="457200" rtl="0" algn="l">
+              <a:spcBef>
+                <a:spcPts val="0"/>
+              </a:spcBef>
+              <a:spcAft>
+                <a:spcPts val="0"/>
+              </a:spcAft>
+              <a:buSzPct val="100000"/>
               <a:buAutoNum type="arabicParenR"/>
             </a:pPr>
             <a:r>
@@ -18851,14 +18951,14 @@
             <a:endParaRPr sz="1500"/>
           </a:p>
           <a:p>
-            <a:pPr indent="-323850" lvl="0" marL="457200" rtl="0" algn="l">
-              <a:spcBef>
-                <a:spcPts val="0"/>
-              </a:spcBef>
-              <a:spcAft>
-                <a:spcPts val="0"/>
-              </a:spcAft>
-              <a:buSzPts val="1500"/>
+            <a:pPr indent="-316706" lvl="0" marL="457200" rtl="0" algn="l">
+              <a:spcBef>
+                <a:spcPts val="0"/>
+              </a:spcBef>
+              <a:spcAft>
+                <a:spcPts val="0"/>
+              </a:spcAft>
+              <a:buSzPct val="100000"/>
               <a:buAutoNum type="arabicParenR"/>
             </a:pPr>
             <a:r>
@@ -18868,14 +18968,14 @@
             <a:endParaRPr sz="1500"/>
           </a:p>
           <a:p>
-            <a:pPr indent="-323850" lvl="0" marL="457200" rtl="0" algn="l">
-              <a:spcBef>
-                <a:spcPts val="0"/>
-              </a:spcBef>
-              <a:spcAft>
-                <a:spcPts val="0"/>
-              </a:spcAft>
-              <a:buSzPts val="1500"/>
+            <a:pPr indent="-316706" lvl="0" marL="457200" rtl="0" algn="l">
+              <a:spcBef>
+                <a:spcPts val="0"/>
+              </a:spcBef>
+              <a:spcAft>
+                <a:spcPts val="0"/>
+              </a:spcAft>
+              <a:buSzPct val="100000"/>
               <a:buAutoNum type="arabicParenR"/>
             </a:pPr>
             <a:r>
@@ -18884,11 +18984,27 @@
             </a:r>
             <a:endParaRPr sz="1500"/>
           </a:p>
+          <a:p>
+            <a:pPr indent="0" lvl="0" marL="0" rtl="0" algn="l">
+              <a:spcBef>
+                <a:spcPts val="1200"/>
+              </a:spcBef>
+              <a:spcAft>
+                <a:spcPts val="1200"/>
+              </a:spcAft>
+              <a:buNone/>
+            </a:pPr>
+            <a:r>
+              <a:rPr lang="en" sz="1500"/>
+              <a:t>Large SSA means group means are far from the grand mean</a:t>
+            </a:r>
+            <a:endParaRPr sz="1500"/>
+          </a:p>
         </p:txBody>
       </p:sp>
       <p:pic>
         <p:nvPicPr>
-          <p:cNvPr id="371" name="Google Shape;371;p23"/>
+          <p:cNvPr id="372" name="Google Shape;372;p23"/>
           <p:cNvPicPr preferRelativeResize="0"/>
           <p:nvPr/>
         </p:nvPicPr>
@@ -18953,7 +19069,7 @@
                                           </p:stCondLst>
                                         </p:cTn>
                                         <p:tgtEl>
-                                          <p:spTgt spid="370">
+                                          <p:spTgt spid="371">
                                             <p:txEl>
                                               <p:pRg end="0" st="0"/>
                                             </p:txEl>
@@ -19002,7 +19118,7 @@
                                           </p:stCondLst>
                                         </p:cTn>
                                         <p:tgtEl>
-                                          <p:spTgt spid="370">
+                                          <p:spTgt spid="371">
                                             <p:txEl>
                                               <p:pRg end="1" st="1"/>
                                             </p:txEl>
@@ -19051,7 +19167,7 @@
                                           </p:stCondLst>
                                         </p:cTn>
                                         <p:tgtEl>
-                                          <p:spTgt spid="370">
+                                          <p:spTgt spid="371">
                                             <p:txEl>
                                               <p:pRg end="2" st="2"/>
                                             </p:txEl>
@@ -19100,7 +19216,7 @@
                                           </p:stCondLst>
                                         </p:cTn>
                                         <p:tgtEl>
-                                          <p:spTgt spid="370">
+                                          <p:spTgt spid="371">
                                             <p:txEl>
                                               <p:pRg end="3" st="3"/>
                                             </p:txEl>
@@ -19149,7 +19265,7 @@
                                           </p:stCondLst>
                                         </p:cTn>
                                         <p:tgtEl>
-                                          <p:spTgt spid="370">
+                                          <p:spTgt spid="371">
                                             <p:txEl>
                                               <p:pRg end="4" st="4"/>
                                             </p:txEl>
@@ -19198,7 +19314,7 @@
                                           </p:stCondLst>
                                         </p:cTn>
                                         <p:tgtEl>
-                                          <p:spTgt spid="370">
+                                          <p:spTgt spid="371">
                                             <p:txEl>
                                               <p:pRg end="5" st="5"/>
                                             </p:txEl>
@@ -19247,7 +19363,7 @@
                                           </p:stCondLst>
                                         </p:cTn>
                                         <p:tgtEl>
-                                          <p:spTgt spid="370">
+                                          <p:spTgt spid="371">
                                             <p:txEl>
                                               <p:pRg end="6" st="6"/>
                                             </p:txEl>
@@ -19296,9 +19412,58 @@
                                           </p:stCondLst>
                                         </p:cTn>
                                         <p:tgtEl>
-                                          <p:spTgt spid="370">
+                                          <p:spTgt spid="371">
                                             <p:txEl>
                                               <p:pRg end="7" st="7"/>
+                                            </p:txEl>
+                                          </p:spTgt>
+                                        </p:tgtEl>
+                                        <p:attrNameLst>
+                                          <p:attrName>style.visibility</p:attrName>
+                                        </p:attrNameLst>
+                                      </p:cBhvr>
+                                      <p:to>
+                                        <p:strVal val="visible"/>
+                                      </p:to>
+                                    </p:set>
+                                  </p:childTnLst>
+                                </p:cTn>
+                              </p:par>
+                            </p:childTnLst>
+                          </p:cTn>
+                        </p:par>
+                      </p:childTnLst>
+                    </p:cTn>
+                  </p:par>
+                  <p:par>
+                    <p:cTn fill="hold">
+                      <p:stCondLst>
+                        <p:cond delay="indefinite"/>
+                      </p:stCondLst>
+                      <p:childTnLst>
+                        <p:par>
+                          <p:cTn fill="hold">
+                            <p:stCondLst>
+                              <p:cond delay="0"/>
+                            </p:stCondLst>
+                            <p:childTnLst>
+                              <p:par>
+                                <p:cTn fill="hold" nodeType="clickEffect" presetClass="entr" presetID="1" presetSubtype="0">
+                                  <p:stCondLst>
+                                    <p:cond delay="0"/>
+                                  </p:stCondLst>
+                                  <p:childTnLst>
+                                    <p:set>
+                                      <p:cBhvr>
+                                        <p:cTn dur="1" fill="hold">
+                                          <p:stCondLst>
+                                            <p:cond delay="0"/>
+                                          </p:stCondLst>
+                                        </p:cTn>
+                                        <p:tgtEl>
+                                          <p:spTgt spid="371">
+                                            <p:txEl>
+                                              <p:pRg end="8" st="8"/>
                                             </p:txEl>
                                           </p:spTgt>
                                         </p:tgtEl>
@@ -19349,7 +19514,7 @@
   <p:cSld>
     <p:spTree>
       <p:nvGrpSpPr>
-        <p:cNvPr id="375" name="Shape 375"/>
+        <p:cNvPr id="376" name="Shape 376"/>
         <p:cNvGrpSpPr/>
         <p:nvPr/>
       </p:nvGrpSpPr>
@@ -19363,7 +19528,7 @@
       </p:grpSpPr>
       <p:sp>
         <p:nvSpPr>
-          <p:cNvPr id="376" name="Google Shape;376;p24"/>
+          <p:cNvPr id="377" name="Google Shape;377;p24"/>
           <p:cNvSpPr txBox="1"/>
           <p:nvPr>
             <p:ph type="title"/>
@@ -19403,7 +19568,7 @@
       </p:sp>
       <p:sp>
         <p:nvSpPr>
-          <p:cNvPr id="377" name="Google Shape;377;p24"/>
+          <p:cNvPr id="378" name="Google Shape;378;p24"/>
           <p:cNvSpPr txBox="1"/>
           <p:nvPr>
             <p:ph idx="1" type="body"/>
@@ -19485,7 +19650,7 @@
                 <a:spcPts val="1200"/>
               </a:spcBef>
               <a:spcAft>
-                <a:spcPts val="1200"/>
+                <a:spcPts val="0"/>
               </a:spcAft>
               <a:buNone/>
             </a:pPr>
@@ -19501,7 +19666,23 @@
               <a:rPr b="1" lang="en" sz="1600"/>
               <a:t> differ</a:t>
             </a:r>
-            <a:endParaRPr sz="1600"/>
+            <a:endParaRPr b="1" sz="1600"/>
+          </a:p>
+          <a:p>
+            <a:pPr indent="0" lvl="0" marL="0" rtl="0" algn="l">
+              <a:spcBef>
+                <a:spcPts val="1200"/>
+              </a:spcBef>
+              <a:spcAft>
+                <a:spcPts val="1200"/>
+              </a:spcAft>
+              <a:buNone/>
+            </a:pPr>
+            <a:r>
+              <a:rPr b="1" lang="en" sz="1600"/>
+              <a:t>If group means are similar, MSA and MSW should be similar so F = 1</a:t>
+            </a:r>
+            <a:endParaRPr b="1" sz="1600"/>
           </a:p>
         </p:txBody>
       </p:sp>
@@ -19544,7 +19725,7 @@
                                           </p:stCondLst>
                                         </p:cTn>
                                         <p:tgtEl>
-                                          <p:spTgt spid="377">
+                                          <p:spTgt spid="378">
                                             <p:txEl>
                                               <p:pRg end="0" st="0"/>
                                             </p:txEl>
@@ -19593,7 +19774,7 @@
                                           </p:stCondLst>
                                         </p:cTn>
                                         <p:tgtEl>
-                                          <p:spTgt spid="377">
+                                          <p:spTgt spid="378">
                                             <p:txEl>
                                               <p:pRg end="1" st="1"/>
                                             </p:txEl>
@@ -19642,7 +19823,7 @@
                                           </p:stCondLst>
                                         </p:cTn>
                                         <p:tgtEl>
-                                          <p:spTgt spid="377">
+                                          <p:spTgt spid="378">
                                             <p:txEl>
                                               <p:pRg end="2" st="2"/>
                                             </p:txEl>
@@ -19691,9 +19872,58 @@
                                           </p:stCondLst>
                                         </p:cTn>
                                         <p:tgtEl>
-                                          <p:spTgt spid="377">
+                                          <p:spTgt spid="378">
                                             <p:txEl>
                                               <p:pRg end="3" st="3"/>
+                                            </p:txEl>
+                                          </p:spTgt>
+                                        </p:tgtEl>
+                                        <p:attrNameLst>
+                                          <p:attrName>style.visibility</p:attrName>
+                                        </p:attrNameLst>
+                                      </p:cBhvr>
+                                      <p:to>
+                                        <p:strVal val="visible"/>
+                                      </p:to>
+                                    </p:set>
+                                  </p:childTnLst>
+                                </p:cTn>
+                              </p:par>
+                            </p:childTnLst>
+                          </p:cTn>
+                        </p:par>
+                      </p:childTnLst>
+                    </p:cTn>
+                  </p:par>
+                  <p:par>
+                    <p:cTn fill="hold">
+                      <p:stCondLst>
+                        <p:cond delay="indefinite"/>
+                      </p:stCondLst>
+                      <p:childTnLst>
+                        <p:par>
+                          <p:cTn fill="hold">
+                            <p:stCondLst>
+                              <p:cond delay="0"/>
+                            </p:stCondLst>
+                            <p:childTnLst>
+                              <p:par>
+                                <p:cTn fill="hold" nodeType="clickEffect" presetClass="entr" presetID="1" presetSubtype="0">
+                                  <p:stCondLst>
+                                    <p:cond delay="0"/>
+                                  </p:stCondLst>
+                                  <p:childTnLst>
+                                    <p:set>
+                                      <p:cBhvr>
+                                        <p:cTn dur="1" fill="hold">
+                                          <p:stCondLst>
+                                            <p:cond delay="0"/>
+                                          </p:stCondLst>
+                                        </p:cTn>
+                                        <p:tgtEl>
+                                          <p:spTgt spid="378">
+                                            <p:txEl>
+                                              <p:pRg end="4" st="4"/>
                                             </p:txEl>
                                           </p:spTgt>
                                         </p:tgtEl>
@@ -19744,7 +19974,7 @@
   <p:cSld>
     <p:spTree>
       <p:nvGrpSpPr>
-        <p:cNvPr id="381" name="Shape 381"/>
+        <p:cNvPr id="382" name="Shape 382"/>
         <p:cNvGrpSpPr/>
         <p:nvPr/>
       </p:nvGrpSpPr>
@@ -19758,7 +19988,7 @@
       </p:grpSpPr>
       <p:sp>
         <p:nvSpPr>
-          <p:cNvPr id="382" name="Google Shape;382;p25"/>
+          <p:cNvPr id="383" name="Google Shape;383;p25"/>
           <p:cNvSpPr txBox="1"/>
           <p:nvPr>
             <p:ph type="title"/>
@@ -19798,7 +20028,7 @@
       </p:sp>
       <p:sp>
         <p:nvSpPr>
-          <p:cNvPr id="383" name="Google Shape;383;p25"/>
+          <p:cNvPr id="384" name="Google Shape;384;p25"/>
           <p:cNvSpPr txBox="1"/>
           <p:nvPr>
             <p:ph idx="1" type="body"/>
@@ -19862,15 +20092,7 @@
             </a:pPr>
             <a:r>
               <a:rPr lang="en" sz="1700"/>
-              <a:t>Select a </a:t>
-            </a:r>
-            <a:r>
-              <a:rPr lang="en" sz="1700"/>
-              <a:t>significance</a:t>
-            </a:r>
-            <a:r>
-              <a:rPr lang="en" sz="1700"/>
-              <a:t> level and consult that specific F table</a:t>
+              <a:t>Df1 = c - 1 and df2 = n - c (where c = number of categories)</a:t>
             </a:r>
             <a:endParaRPr sz="1700"/>
           </a:p>
@@ -19886,7 +20108,7 @@
             </a:pPr>
             <a:r>
               <a:rPr lang="en" sz="1700"/>
-              <a:t>Df1 = c - 1 and df2 = n - c (where c = number of categories)</a:t>
+              <a:t>Given alpha, df1, and df2, find F critical value from the F dist</a:t>
             </a:r>
             <a:endParaRPr sz="1700"/>
           </a:p>
@@ -19910,7 +20132,7 @@
       </p:sp>
       <p:sp>
         <p:nvSpPr>
-          <p:cNvPr id="384" name="Google Shape;384;p25"/>
+          <p:cNvPr id="385" name="Google Shape;385;p25"/>
           <p:cNvSpPr/>
           <p:nvPr/>
         </p:nvSpPr>
@@ -19998,7 +20220,7 @@
       </p:sp>
       <p:sp>
         <p:nvSpPr>
-          <p:cNvPr id="385" name="Google Shape;385;p25"/>
+          <p:cNvPr id="386" name="Google Shape;386;p25"/>
           <p:cNvSpPr/>
           <p:nvPr/>
         </p:nvSpPr>
@@ -20069,7 +20291,7 @@
       </p:sp>
       <p:sp>
         <p:nvSpPr>
-          <p:cNvPr id="386" name="Google Shape;386;p25"/>
+          <p:cNvPr id="387" name="Google Shape;387;p25"/>
           <p:cNvSpPr txBox="1"/>
           <p:nvPr/>
         </p:nvSpPr>
@@ -20139,7 +20361,7 @@
       </p:sp>
       <p:sp>
         <p:nvSpPr>
-          <p:cNvPr id="387" name="Google Shape;387;p25"/>
+          <p:cNvPr id="388" name="Google Shape;388;p25"/>
           <p:cNvSpPr/>
           <p:nvPr/>
         </p:nvSpPr>
@@ -20224,7 +20446,7 @@
       </p:sp>
       <p:cxnSp>
         <p:nvCxnSpPr>
-          <p:cNvPr id="388" name="Google Shape;388;p25"/>
+          <p:cNvPr id="389" name="Google Shape;389;p25"/>
           <p:cNvCxnSpPr/>
           <p:nvPr/>
         </p:nvCxnSpPr>
@@ -20250,7 +20472,7 @@
       </p:cxnSp>
       <p:cxnSp>
         <p:nvCxnSpPr>
-          <p:cNvPr id="389" name="Google Shape;389;p25"/>
+          <p:cNvPr id="390" name="Google Shape;390;p25"/>
           <p:cNvCxnSpPr/>
           <p:nvPr/>
         </p:nvCxnSpPr>
@@ -20276,7 +20498,7 @@
       </p:cxnSp>
       <p:sp>
         <p:nvSpPr>
-          <p:cNvPr id="390" name="Google Shape;390;p25"/>
+          <p:cNvPr id="391" name="Google Shape;391;p25"/>
           <p:cNvSpPr txBox="1"/>
           <p:nvPr/>
         </p:nvSpPr>
@@ -20334,7 +20556,7 @@
       </p:sp>
       <p:cxnSp>
         <p:nvCxnSpPr>
-          <p:cNvPr id="391" name="Google Shape;391;p25"/>
+          <p:cNvPr id="392" name="Google Shape;392;p25"/>
           <p:cNvCxnSpPr/>
           <p:nvPr/>
         </p:nvCxnSpPr>
@@ -20360,7 +20582,7 @@
       </p:cxnSp>
       <p:cxnSp>
         <p:nvCxnSpPr>
-          <p:cNvPr id="392" name="Google Shape;392;p25"/>
+          <p:cNvPr id="393" name="Google Shape;393;p25"/>
           <p:cNvCxnSpPr/>
           <p:nvPr/>
         </p:nvCxnSpPr>
@@ -20386,7 +20608,7 @@
       </p:cxnSp>
       <p:cxnSp>
         <p:nvCxnSpPr>
-          <p:cNvPr id="393" name="Google Shape;393;p25"/>
+          <p:cNvPr id="394" name="Google Shape;394;p25"/>
           <p:cNvCxnSpPr/>
           <p:nvPr/>
         </p:nvCxnSpPr>
@@ -20412,7 +20634,7 @@
       </p:cxnSp>
       <p:sp>
         <p:nvSpPr>
-          <p:cNvPr id="394" name="Google Shape;394;p25"/>
+          <p:cNvPr id="395" name="Google Shape;395;p25"/>
           <p:cNvSpPr txBox="1"/>
           <p:nvPr/>
         </p:nvSpPr>
@@ -20482,7 +20704,7 @@
       </p:sp>
       <p:sp>
         <p:nvSpPr>
-          <p:cNvPr id="395" name="Google Shape;395;p25"/>
+          <p:cNvPr id="396" name="Google Shape;396;p25"/>
           <p:cNvSpPr txBox="1"/>
           <p:nvPr/>
         </p:nvSpPr>
@@ -20584,7 +20806,7 @@
       </p:sp>
       <p:sp>
         <p:nvSpPr>
-          <p:cNvPr id="396" name="Google Shape;396;p25"/>
+          <p:cNvPr id="397" name="Google Shape;397;p25"/>
           <p:cNvSpPr txBox="1"/>
           <p:nvPr/>
         </p:nvSpPr>
@@ -20654,7 +20876,7 @@
       </p:sp>
       <p:pic>
         <p:nvPicPr>
-          <p:cNvPr id="397" name="Google Shape;397;p25"/>
+          <p:cNvPr id="398" name="Google Shape;398;p25"/>
           <p:cNvPicPr preferRelativeResize="0"/>
           <p:nvPr/>
         </p:nvPicPr>
@@ -20693,7 +20915,7 @@
   <p:cSld>
     <p:spTree>
       <p:nvGrpSpPr>
-        <p:cNvPr id="401" name="Shape 401"/>
+        <p:cNvPr id="402" name="Shape 402"/>
         <p:cNvGrpSpPr/>
         <p:nvPr/>
       </p:nvGrpSpPr>
@@ -20707,7 +20929,7 @@
       </p:grpSpPr>
       <p:sp>
         <p:nvSpPr>
-          <p:cNvPr id="402" name="Google Shape;402;p26"/>
+          <p:cNvPr id="403" name="Google Shape;403;p26"/>
           <p:cNvSpPr txBox="1"/>
           <p:nvPr>
             <p:ph type="title"/>
@@ -20747,7 +20969,7 @@
       </p:sp>
       <p:sp>
         <p:nvSpPr>
-          <p:cNvPr id="403" name="Google Shape;403;p26"/>
+          <p:cNvPr id="404" name="Google Shape;404;p26"/>
           <p:cNvSpPr txBox="1"/>
           <p:nvPr>
             <p:ph idx="1" type="body"/>
@@ -20899,7 +21121,7 @@
       </p:sp>
       <p:pic>
         <p:nvPicPr>
-          <p:cNvPr id="404" name="Google Shape;404;p26"/>
+          <p:cNvPr id="405" name="Google Shape;405;p26"/>
           <p:cNvPicPr preferRelativeResize="0"/>
           <p:nvPr/>
         </p:nvPicPr>
@@ -20927,7 +21149,7 @@
       </p:pic>
       <p:pic>
         <p:nvPicPr>
-          <p:cNvPr id="405" name="Google Shape;405;p26"/>
+          <p:cNvPr id="406" name="Google Shape;406;p26"/>
           <p:cNvPicPr preferRelativeResize="0"/>
           <p:nvPr/>
         </p:nvPicPr>
@@ -20992,7 +21214,7 @@
                                           </p:stCondLst>
                                         </p:cTn>
                                         <p:tgtEl>
-                                          <p:spTgt spid="403">
+                                          <p:spTgt spid="404">
                                             <p:txEl>
                                               <p:pRg end="0" st="0"/>
                                             </p:txEl>
@@ -21041,7 +21263,7 @@
                                           </p:stCondLst>
                                         </p:cTn>
                                         <p:tgtEl>
-                                          <p:spTgt spid="403">
+                                          <p:spTgt spid="404">
                                             <p:txEl>
                                               <p:pRg end="1" st="1"/>
                                             </p:txEl>
@@ -21090,7 +21312,7 @@
                                           </p:stCondLst>
                                         </p:cTn>
                                         <p:tgtEl>
-                                          <p:spTgt spid="403">
+                                          <p:spTgt spid="404">
                                             <p:txEl>
                                               <p:pRg end="2" st="2"/>
                                             </p:txEl>
@@ -21139,7 +21361,7 @@
                                           </p:stCondLst>
                                         </p:cTn>
                                         <p:tgtEl>
-                                          <p:spTgt spid="403">
+                                          <p:spTgt spid="404">
                                             <p:txEl>
                                               <p:pRg end="3" st="3"/>
                                             </p:txEl>
@@ -21188,7 +21410,7 @@
                                           </p:stCondLst>
                                         </p:cTn>
                                         <p:tgtEl>
-                                          <p:spTgt spid="403">
+                                          <p:spTgt spid="404">
                                             <p:txEl>
                                               <p:pRg end="4" st="4"/>
                                             </p:txEl>
@@ -21237,7 +21459,7 @@
                                           </p:stCondLst>
                                         </p:cTn>
                                         <p:tgtEl>
-                                          <p:spTgt spid="403">
+                                          <p:spTgt spid="404">
                                             <p:txEl>
                                               <p:pRg end="5" st="5"/>
                                             </p:txEl>
@@ -21286,7 +21508,7 @@
                                           </p:stCondLst>
                                         </p:cTn>
                                         <p:tgtEl>
-                                          <p:spTgt spid="403">
+                                          <p:spTgt spid="404">
                                             <p:txEl>
                                               <p:pRg end="6" st="6"/>
                                             </p:txEl>
@@ -21335,7 +21557,7 @@
                                           </p:stCondLst>
                                         </p:cTn>
                                         <p:tgtEl>
-                                          <p:spTgt spid="403">
+                                          <p:spTgt spid="404">
                                             <p:txEl>
                                               <p:pRg end="7" st="7"/>
                                             </p:txEl>
@@ -21388,7 +21610,7 @@
   <p:cSld>
     <p:spTree>
       <p:nvGrpSpPr>
-        <p:cNvPr id="409" name="Shape 409"/>
+        <p:cNvPr id="410" name="Shape 410"/>
         <p:cNvGrpSpPr/>
         <p:nvPr/>
       </p:nvGrpSpPr>
@@ -21402,7 +21624,7 @@
       </p:grpSpPr>
       <p:pic>
         <p:nvPicPr>
-          <p:cNvPr id="410" name="Google Shape;410;p27"/>
+          <p:cNvPr id="411" name="Google Shape;411;p27"/>
           <p:cNvPicPr preferRelativeResize="0"/>
           <p:nvPr/>
         </p:nvPicPr>
@@ -21430,7 +21652,7 @@
       </p:pic>
       <p:pic>
         <p:nvPicPr>
-          <p:cNvPr id="411" name="Google Shape;411;p27"/>
+          <p:cNvPr id="412" name="Google Shape;412;p27"/>
           <p:cNvPicPr preferRelativeResize="0"/>
           <p:nvPr/>
         </p:nvPicPr>
@@ -21458,7 +21680,7 @@
       </p:pic>
       <p:sp>
         <p:nvSpPr>
-          <p:cNvPr id="412" name="Google Shape;412;p27"/>
+          <p:cNvPr id="413" name="Google Shape;413;p27"/>
           <p:cNvSpPr txBox="1"/>
           <p:nvPr/>
         </p:nvSpPr>
@@ -21516,7 +21738,7 @@
       </p:sp>
       <p:cxnSp>
         <p:nvCxnSpPr>
-          <p:cNvPr id="413" name="Google Shape;413;p27"/>
+          <p:cNvPr id="414" name="Google Shape;414;p27"/>
           <p:cNvCxnSpPr/>
           <p:nvPr/>
         </p:nvCxnSpPr>
@@ -21553,7 +21775,7 @@
   <p:cSld>
     <p:spTree>
       <p:nvGrpSpPr>
-        <p:cNvPr id="417" name="Shape 417"/>
+        <p:cNvPr id="418" name="Shape 418"/>
         <p:cNvGrpSpPr/>
         <p:nvPr/>
       </p:nvGrpSpPr>
@@ -21567,7 +21789,7 @@
       </p:grpSpPr>
       <p:pic>
         <p:nvPicPr>
-          <p:cNvPr id="418" name="Google Shape;418;p28"/>
+          <p:cNvPr id="419" name="Google Shape;419;p28"/>
           <p:cNvPicPr preferRelativeResize="0"/>
           <p:nvPr/>
         </p:nvPicPr>
@@ -21595,7 +21817,7 @@
       </p:pic>
       <p:pic>
         <p:nvPicPr>
-          <p:cNvPr id="419" name="Google Shape;419;p28"/>
+          <p:cNvPr id="420" name="Google Shape;420;p28"/>
           <p:cNvPicPr preferRelativeResize="0"/>
           <p:nvPr/>
         </p:nvPicPr>
@@ -21623,7 +21845,7 @@
       </p:pic>
       <p:cxnSp>
         <p:nvCxnSpPr>
-          <p:cNvPr id="420" name="Google Shape;420;p28"/>
+          <p:cNvPr id="421" name="Google Shape;421;p28"/>
           <p:cNvCxnSpPr/>
           <p:nvPr/>
         </p:nvCxnSpPr>
@@ -21649,7 +21871,7 @@
       </p:cxnSp>
       <p:cxnSp>
         <p:nvCxnSpPr>
-          <p:cNvPr id="421" name="Google Shape;421;p28"/>
+          <p:cNvPr id="422" name="Google Shape;422;p28"/>
           <p:cNvCxnSpPr/>
           <p:nvPr/>
         </p:nvCxnSpPr>
@@ -21675,7 +21897,7 @@
       </p:cxnSp>
       <p:sp>
         <p:nvSpPr>
-          <p:cNvPr id="422" name="Google Shape;422;p28"/>
+          <p:cNvPr id="423" name="Google Shape;423;p28"/>
           <p:cNvSpPr txBox="1"/>
           <p:nvPr/>
         </p:nvSpPr>
@@ -21744,7 +21966,7 @@
   <p:cSld>
     <p:spTree>
       <p:nvGrpSpPr>
-        <p:cNvPr id="426" name="Shape 426"/>
+        <p:cNvPr id="427" name="Shape 427"/>
         <p:cNvGrpSpPr/>
         <p:nvPr/>
       </p:nvGrpSpPr>
@@ -21758,7 +21980,7 @@
       </p:grpSpPr>
       <p:pic>
         <p:nvPicPr>
-          <p:cNvPr id="427" name="Google Shape;427;p29"/>
+          <p:cNvPr id="428" name="Google Shape;428;p29"/>
           <p:cNvPicPr preferRelativeResize="0"/>
           <p:nvPr/>
         </p:nvPicPr>
@@ -21786,7 +22008,7 @@
       </p:pic>
       <p:pic>
         <p:nvPicPr>
-          <p:cNvPr id="428" name="Google Shape;428;p29"/>
+          <p:cNvPr id="429" name="Google Shape;429;p29"/>
           <p:cNvPicPr preferRelativeResize="0"/>
           <p:nvPr/>
         </p:nvPicPr>
@@ -21814,7 +22036,7 @@
       </p:pic>
       <p:cxnSp>
         <p:nvCxnSpPr>
-          <p:cNvPr id="429" name="Google Shape;429;p29"/>
+          <p:cNvPr id="430" name="Google Shape;430;p29"/>
           <p:cNvCxnSpPr/>
           <p:nvPr/>
         </p:nvCxnSpPr>
@@ -21840,7 +22062,7 @@
       </p:cxnSp>
       <p:cxnSp>
         <p:nvCxnSpPr>
-          <p:cNvPr id="430" name="Google Shape;430;p29"/>
+          <p:cNvPr id="431" name="Google Shape;431;p29"/>
           <p:cNvCxnSpPr/>
           <p:nvPr/>
         </p:nvCxnSpPr>
@@ -21866,7 +22088,7 @@
       </p:cxnSp>
       <p:sp>
         <p:nvSpPr>
-          <p:cNvPr id="431" name="Google Shape;431;p29"/>
+          <p:cNvPr id="432" name="Google Shape;432;p29"/>
           <p:cNvSpPr txBox="1"/>
           <p:nvPr/>
         </p:nvSpPr>
@@ -21935,7 +22157,7 @@
   <p:cSld>
     <p:spTree>
       <p:nvGrpSpPr>
-        <p:cNvPr id="435" name="Shape 435"/>
+        <p:cNvPr id="436" name="Shape 436"/>
         <p:cNvGrpSpPr/>
         <p:nvPr/>
       </p:nvGrpSpPr>
@@ -21949,7 +22171,7 @@
       </p:grpSpPr>
       <p:sp>
         <p:nvSpPr>
-          <p:cNvPr id="436" name="Google Shape;436;p30"/>
+          <p:cNvPr id="437" name="Google Shape;437;p30"/>
           <p:cNvSpPr txBox="1"/>
           <p:nvPr>
             <p:ph type="title"/>
@@ -21989,7 +22211,7 @@
       </p:sp>
       <p:sp>
         <p:nvSpPr>
-          <p:cNvPr id="437" name="Google Shape;437;p30"/>
+          <p:cNvPr id="438" name="Google Shape;438;p30"/>
           <p:cNvSpPr txBox="1"/>
           <p:nvPr>
             <p:ph idx="1" type="body"/>
@@ -22174,7 +22396,7 @@
   <p:cSld>
     <p:spTree>
       <p:nvGrpSpPr>
-        <p:cNvPr id="441" name="Shape 441"/>
+        <p:cNvPr id="442" name="Shape 442"/>
         <p:cNvGrpSpPr/>
         <p:nvPr/>
       </p:nvGrpSpPr>
@@ -22188,7 +22410,7 @@
       </p:grpSpPr>
       <p:sp>
         <p:nvSpPr>
-          <p:cNvPr id="442" name="Google Shape;442;p31"/>
+          <p:cNvPr id="443" name="Google Shape;443;p31"/>
           <p:cNvSpPr txBox="1"/>
           <p:nvPr>
             <p:ph type="title"/>
@@ -22228,7 +22450,7 @@
       </p:sp>
       <p:pic>
         <p:nvPicPr>
-          <p:cNvPr id="443" name="Google Shape;443;p31"/>
+          <p:cNvPr id="444" name="Google Shape;444;p31"/>
           <p:cNvPicPr preferRelativeResize="0"/>
           <p:nvPr/>
         </p:nvPicPr>
@@ -22256,7 +22478,7 @@
       </p:pic>
       <p:sp>
         <p:nvSpPr>
-          <p:cNvPr id="444" name="Google Shape;444;p31"/>
+          <p:cNvPr id="445" name="Google Shape;445;p31"/>
           <p:cNvSpPr txBox="1"/>
           <p:nvPr/>
         </p:nvSpPr>
@@ -22314,7 +22536,7 @@
       </p:sp>
       <p:pic>
         <p:nvPicPr>
-          <p:cNvPr id="445" name="Google Shape;445;p31"/>
+          <p:cNvPr id="446" name="Google Shape;446;p31"/>
           <p:cNvPicPr preferRelativeResize="0"/>
           <p:nvPr/>
         </p:nvPicPr>
@@ -22342,7 +22564,7 @@
       </p:pic>
       <p:sp>
         <p:nvSpPr>
-          <p:cNvPr id="446" name="Google Shape;446;p31"/>
+          <p:cNvPr id="447" name="Google Shape;447;p31"/>
           <p:cNvSpPr txBox="1"/>
           <p:nvPr/>
         </p:nvSpPr>
@@ -22400,7 +22622,7 @@
       </p:sp>
       <p:sp>
         <p:nvSpPr>
-          <p:cNvPr id="447" name="Google Shape;447;p31"/>
+          <p:cNvPr id="448" name="Google Shape;448;p31"/>
           <p:cNvSpPr txBox="1"/>
           <p:nvPr/>
         </p:nvSpPr>
@@ -23010,7 +23232,7 @@
   <p:cSld>
     <p:spTree>
       <p:nvGrpSpPr>
-        <p:cNvPr id="451" name="Shape 451"/>
+        <p:cNvPr id="452" name="Shape 452"/>
         <p:cNvGrpSpPr/>
         <p:nvPr/>
       </p:nvGrpSpPr>
@@ -23024,7 +23246,7 @@
       </p:grpSpPr>
       <p:sp>
         <p:nvSpPr>
-          <p:cNvPr id="452" name="Google Shape;452;p32"/>
+          <p:cNvPr id="453" name="Google Shape;453;p32"/>
           <p:cNvSpPr txBox="1"/>
           <p:nvPr>
             <p:ph type="title"/>
@@ -23064,7 +23286,7 @@
       </p:sp>
       <p:sp>
         <p:nvSpPr>
-          <p:cNvPr id="453" name="Google Shape;453;p32"/>
+          <p:cNvPr id="454" name="Google Shape;454;p32"/>
           <p:cNvSpPr txBox="1"/>
           <p:nvPr>
             <p:ph idx="1" type="body"/>
@@ -23128,7 +23350,15 @@
             </a:pPr>
             <a:r>
               <a:rPr lang="en" sz="1800"/>
-              <a:t>ANOVA effect size tells us how much of the variation in the outcome is explained by the factors included in the model</a:t>
+              <a:t>ANOVA effect size tells us how much of the variation in the outcome is explained by the factors included in the model, not just </a:t>
+            </a:r>
+            <a:r>
+              <a:rPr lang="en" sz="1800"/>
+              <a:t>whether</a:t>
+            </a:r>
+            <a:r>
+              <a:rPr lang="en" sz="1800"/>
+              <a:t> the effect is statistically significant </a:t>
             </a:r>
             <a:endParaRPr sz="1800"/>
           </a:p>
@@ -23147,7 +23377,7 @@
   <p:cSld>
     <p:spTree>
       <p:nvGrpSpPr>
-        <p:cNvPr id="457" name="Shape 457"/>
+        <p:cNvPr id="458" name="Shape 458"/>
         <p:cNvGrpSpPr/>
         <p:nvPr/>
       </p:nvGrpSpPr>
@@ -23161,7 +23391,7 @@
       </p:grpSpPr>
       <p:sp>
         <p:nvSpPr>
-          <p:cNvPr id="458" name="Google Shape;458;p33"/>
+          <p:cNvPr id="459" name="Google Shape;459;p33"/>
           <p:cNvSpPr txBox="1"/>
           <p:nvPr>
             <p:ph type="title"/>
@@ -23201,7 +23431,7 @@
       </p:sp>
       <p:sp>
         <p:nvSpPr>
-          <p:cNvPr id="459" name="Google Shape;459;p33"/>
+          <p:cNvPr id="460" name="Google Shape;460;p33"/>
           <p:cNvSpPr txBox="1"/>
           <p:nvPr>
             <p:ph idx="1" type="body"/>
@@ -23257,7 +23487,7 @@
             </a:pPr>
             <a:r>
               <a:rPr lang="en" sz="1405"/>
-              <a:t>Eta-squared (n^2): SSA / SST</a:t>
+              <a:t>Eta-squared: SSA / SST</a:t>
             </a:r>
             <a:endParaRPr sz="1405"/>
           </a:p>
@@ -23384,7 +23614,7 @@
       </p:sp>
       <p:pic>
         <p:nvPicPr>
-          <p:cNvPr id="460" name="Google Shape;460;p33"/>
+          <p:cNvPr id="461" name="Google Shape;461;p33"/>
           <p:cNvPicPr preferRelativeResize="0"/>
           <p:nvPr/>
         </p:nvPicPr>
@@ -23423,7 +23653,7 @@
   <p:cSld>
     <p:spTree>
       <p:nvGrpSpPr>
-        <p:cNvPr id="464" name="Shape 464"/>
+        <p:cNvPr id="465" name="Shape 465"/>
         <p:cNvGrpSpPr/>
         <p:nvPr/>
       </p:nvGrpSpPr>
@@ -23437,7 +23667,7 @@
       </p:grpSpPr>
       <p:sp>
         <p:nvSpPr>
-          <p:cNvPr id="465" name="Google Shape;465;p34"/>
+          <p:cNvPr id="466" name="Google Shape;466;p34"/>
           <p:cNvSpPr txBox="1"/>
           <p:nvPr>
             <p:ph type="title"/>
@@ -23477,7 +23707,7 @@
       </p:sp>
       <p:sp>
         <p:nvSpPr>
-          <p:cNvPr id="466" name="Google Shape;466;p34"/>
+          <p:cNvPr id="467" name="Google Shape;467;p34"/>
           <p:cNvSpPr txBox="1"/>
           <p:nvPr>
             <p:ph idx="1" type="body"/>
@@ -23585,7 +23815,7 @@
       </p:sp>
       <p:pic>
         <p:nvPicPr>
-          <p:cNvPr id="467" name="Google Shape;467;p34"/>
+          <p:cNvPr id="468" name="Google Shape;468;p34"/>
           <p:cNvPicPr preferRelativeResize="0"/>
           <p:nvPr/>
         </p:nvPicPr>
@@ -23624,7 +23854,7 @@
   <p:cSld>
     <p:spTree>
       <p:nvGrpSpPr>
-        <p:cNvPr id="471" name="Shape 471"/>
+        <p:cNvPr id="472" name="Shape 472"/>
         <p:cNvGrpSpPr/>
         <p:nvPr/>
       </p:nvGrpSpPr>
@@ -23638,7 +23868,7 @@
       </p:grpSpPr>
       <p:sp>
         <p:nvSpPr>
-          <p:cNvPr id="472" name="Google Shape;472;p35"/>
+          <p:cNvPr id="473" name="Google Shape;473;p35"/>
           <p:cNvSpPr txBox="1"/>
           <p:nvPr>
             <p:ph type="title"/>
@@ -23678,7 +23908,7 @@
       </p:sp>
       <p:sp>
         <p:nvSpPr>
-          <p:cNvPr id="473" name="Google Shape;473;p35"/>
+          <p:cNvPr id="474" name="Google Shape;474;p35"/>
           <p:cNvSpPr txBox="1"/>
           <p:nvPr>
             <p:ph idx="1" type="body"/>
@@ -23726,7 +23956,7 @@
             </a:pPr>
             <a:r>
               <a:rPr lang="en"/>
-              <a:t>Tests effect of each factor</a:t>
+              <a:t>Tests main effect of each factor</a:t>
             </a:r>
             <a:endParaRPr/>
           </a:p>
@@ -23774,7 +24004,7 @@
       </p:sp>
       <p:pic>
         <p:nvPicPr>
-          <p:cNvPr id="474" name="Google Shape;474;p35"/>
+          <p:cNvPr id="475" name="Google Shape;475;p35"/>
           <p:cNvPicPr preferRelativeResize="0"/>
           <p:nvPr/>
         </p:nvPicPr>
@@ -23802,7 +24032,7 @@
       </p:pic>
       <p:pic>
         <p:nvPicPr>
-          <p:cNvPr id="475" name="Google Shape;475;p35"/>
+          <p:cNvPr id="476" name="Google Shape;476;p35"/>
           <p:cNvPicPr preferRelativeResize="0"/>
           <p:nvPr/>
         </p:nvPicPr>
@@ -23867,7 +24097,7 @@
                                           </p:stCondLst>
                                         </p:cTn>
                                         <p:tgtEl>
-                                          <p:spTgt spid="473">
+                                          <p:spTgt spid="474">
                                             <p:txEl>
                                               <p:pRg end="0" st="0"/>
                                             </p:txEl>
@@ -23916,7 +24146,7 @@
                                           </p:stCondLst>
                                         </p:cTn>
                                         <p:tgtEl>
-                                          <p:spTgt spid="473">
+                                          <p:spTgt spid="474">
                                             <p:txEl>
                                               <p:pRg end="1" st="1"/>
                                             </p:txEl>
@@ -23965,7 +24195,7 @@
                                           </p:stCondLst>
                                         </p:cTn>
                                         <p:tgtEl>
-                                          <p:spTgt spid="473">
+                                          <p:spTgt spid="474">
                                             <p:txEl>
                                               <p:pRg end="2" st="2"/>
                                             </p:txEl>
@@ -24014,7 +24244,7 @@
                                           </p:stCondLst>
                                         </p:cTn>
                                         <p:tgtEl>
-                                          <p:spTgt spid="473">
+                                          <p:spTgt spid="474">
                                             <p:txEl>
                                               <p:pRg end="3" st="3"/>
                                             </p:txEl>
@@ -24067,7 +24297,7 @@
   <p:cSld>
     <p:spTree>
       <p:nvGrpSpPr>
-        <p:cNvPr id="479" name="Shape 479"/>
+        <p:cNvPr id="480" name="Shape 480"/>
         <p:cNvGrpSpPr/>
         <p:nvPr/>
       </p:nvGrpSpPr>
@@ -24081,7 +24311,7 @@
       </p:grpSpPr>
       <p:pic>
         <p:nvPicPr>
-          <p:cNvPr id="480" name="Google Shape;480;p36"/>
+          <p:cNvPr id="481" name="Google Shape;481;p36"/>
           <p:cNvPicPr preferRelativeResize="0"/>
           <p:nvPr/>
         </p:nvPicPr>
@@ -24109,7 +24339,7 @@
       </p:pic>
       <p:pic>
         <p:nvPicPr>
-          <p:cNvPr id="481" name="Google Shape;481;p36"/>
+          <p:cNvPr id="482" name="Google Shape;482;p36"/>
           <p:cNvPicPr preferRelativeResize="0"/>
           <p:nvPr/>
         </p:nvPicPr>
@@ -24137,7 +24367,7 @@
       </p:pic>
       <p:sp>
         <p:nvSpPr>
-          <p:cNvPr id="482" name="Google Shape;482;p36"/>
+          <p:cNvPr id="483" name="Google Shape;483;p36"/>
           <p:cNvSpPr txBox="1"/>
           <p:nvPr/>
         </p:nvSpPr>
@@ -24201,7 +24431,7 @@
       </p:sp>
       <p:sp>
         <p:nvSpPr>
-          <p:cNvPr id="483" name="Google Shape;483;p36"/>
+          <p:cNvPr id="484" name="Google Shape;484;p36"/>
           <p:cNvSpPr txBox="1"/>
           <p:nvPr/>
         </p:nvSpPr>
@@ -24313,7 +24543,7 @@
                 <a:cs typeface="Nunito"/>
                 <a:sym typeface="Nunito"/>
               </a:rPr>
-              <a:t>This means the effect of major does not vary based on school type.</a:t>
+              <a:t>This suggests the effect of major does not vary based on school type.</a:t>
             </a:r>
             <a:endParaRPr sz="1100">
               <a:latin typeface="Nunito"/>
@@ -24357,7 +24587,7 @@
   <p:cSld>
     <p:spTree>
       <p:nvGrpSpPr>
-        <p:cNvPr id="487" name="Shape 487"/>
+        <p:cNvPr id="488" name="Shape 488"/>
         <p:cNvGrpSpPr/>
         <p:nvPr/>
       </p:nvGrpSpPr>
@@ -24371,7 +24601,7 @@
       </p:grpSpPr>
       <p:pic>
         <p:nvPicPr>
-          <p:cNvPr id="488" name="Google Shape;488;p37"/>
+          <p:cNvPr id="489" name="Google Shape;489;p37"/>
           <p:cNvPicPr preferRelativeResize="0"/>
           <p:nvPr/>
         </p:nvPicPr>
@@ -24399,7 +24629,7 @@
       </p:pic>
       <p:pic>
         <p:nvPicPr>
-          <p:cNvPr id="489" name="Google Shape;489;p37"/>
+          <p:cNvPr id="490" name="Google Shape;490;p37"/>
           <p:cNvPicPr preferRelativeResize="0"/>
           <p:nvPr/>
         </p:nvPicPr>
@@ -24427,7 +24657,7 @@
       </p:pic>
       <p:sp>
         <p:nvSpPr>
-          <p:cNvPr id="490" name="Google Shape;490;p37"/>
+          <p:cNvPr id="491" name="Google Shape;491;p37"/>
           <p:cNvSpPr txBox="1"/>
           <p:nvPr/>
         </p:nvSpPr>
@@ -24485,7 +24715,7 @@
       </p:sp>
       <p:cxnSp>
         <p:nvCxnSpPr>
-          <p:cNvPr id="491" name="Google Shape;491;p37"/>
+          <p:cNvPr id="492" name="Google Shape;492;p37"/>
           <p:cNvCxnSpPr/>
           <p:nvPr/>
         </p:nvCxnSpPr>
@@ -24511,7 +24741,7 @@
       </p:cxnSp>
       <p:sp>
         <p:nvSpPr>
-          <p:cNvPr id="492" name="Google Shape;492;p37"/>
+          <p:cNvPr id="493" name="Google Shape;493;p37"/>
           <p:cNvSpPr txBox="1"/>
           <p:nvPr/>
         </p:nvSpPr>
@@ -24580,7 +24810,7 @@
   <p:cSld>
     <p:spTree>
       <p:nvGrpSpPr>
-        <p:cNvPr id="496" name="Shape 496"/>
+        <p:cNvPr id="497" name="Shape 497"/>
         <p:cNvGrpSpPr/>
         <p:nvPr/>
       </p:nvGrpSpPr>
@@ -24594,7 +24824,7 @@
       </p:grpSpPr>
       <p:sp>
         <p:nvSpPr>
-          <p:cNvPr id="497" name="Google Shape;497;p38"/>
+          <p:cNvPr id="498" name="Google Shape;498;p38"/>
           <p:cNvSpPr txBox="1"/>
           <p:nvPr>
             <p:ph type="title"/>
@@ -24634,7 +24864,7 @@
       </p:sp>
       <p:sp>
         <p:nvSpPr>
-          <p:cNvPr id="498" name="Google Shape;498;p38"/>
+          <p:cNvPr id="499" name="Google Shape;499;p38"/>
           <p:cNvSpPr txBox="1"/>
           <p:nvPr>
             <p:ph idx="1" type="body"/>
@@ -24651,7 +24881,7 @@
         </p:spPr>
         <p:txBody>
           <a:bodyPr anchorCtr="0" anchor="t" bIns="91425" lIns="91425" spcFirstLastPara="1" rIns="91425" wrap="square" tIns="91425">
-            <a:normAutofit lnSpcReduction="20000"/>
+            <a:normAutofit lnSpcReduction="10000"/>
           </a:bodyPr>
           <a:lstStyle/>
           <a:p>
@@ -24666,7 +24896,7 @@
             </a:pPr>
             <a:r>
               <a:rPr lang="en"/>
-              <a:t>ANOVA for major (Education, Engineering,, Sociology) could be estimated as regression with dummy variables for each (but one) level</a:t>
+              <a:t>ANOVA for major (Education, Engineering,, Sociology) could be estimated as regression with dummy variables for all but one level</a:t>
             </a:r>
             <a:endParaRPr/>
           </a:p>
@@ -24722,7 +24952,15 @@
             </a:pPr>
             <a:r>
               <a:rPr lang="en"/>
-              <a:t>F-Test for regression tests B1 = B2 = B3 = Bn = 0</a:t>
+              <a:t>F-Test for regression tests </a:t>
+            </a:r>
+            <a:r>
+              <a:rPr lang="en"/>
+              <a:t>whether</a:t>
+            </a:r>
+            <a:r>
+              <a:rPr lang="en"/>
+              <a:t> all non-reference groups equal zero</a:t>
             </a:r>
             <a:endParaRPr/>
           </a:p>
@@ -24730,7 +24968,7 @@
       </p:sp>
       <p:pic>
         <p:nvPicPr>
-          <p:cNvPr id="499" name="Google Shape;499;p38"/>
+          <p:cNvPr id="500" name="Google Shape;500;p38"/>
           <p:cNvPicPr preferRelativeResize="0"/>
           <p:nvPr/>
         </p:nvPicPr>
@@ -24769,7 +25007,7 @@
   <p:cSld>
     <p:spTree>
       <p:nvGrpSpPr>
-        <p:cNvPr id="503" name="Shape 503"/>
+        <p:cNvPr id="504" name="Shape 504"/>
         <p:cNvGrpSpPr/>
         <p:nvPr/>
       </p:nvGrpSpPr>
@@ -24783,7 +25021,7 @@
       </p:grpSpPr>
       <p:sp>
         <p:nvSpPr>
-          <p:cNvPr id="504" name="Google Shape;504;p39"/>
+          <p:cNvPr id="505" name="Google Shape;505;p39"/>
           <p:cNvSpPr txBox="1"/>
           <p:nvPr>
             <p:ph type="title"/>
@@ -24791,8 +25029,8 @@
         </p:nvSpPr>
         <p:spPr>
           <a:xfrm>
-            <a:off x="1303800" y="598575"/>
-            <a:ext cx="7030500" cy="999300"/>
+            <a:off x="1239425" y="121050"/>
+            <a:ext cx="7474500" cy="999300"/>
           </a:xfrm>
           <a:prstGeom prst="rect">
             <a:avLst/>
@@ -24815,7 +25053,7 @@
             </a:pPr>
             <a:r>
               <a:rPr lang="en"/>
-              <a:t>Q-Q Plot and Histogram For Normality (Again) </a:t>
+              <a:t>Q-Q Plot and Histogram For Residual Normality (Again) </a:t>
             </a:r>
             <a:endParaRPr/>
           </a:p>
@@ -24823,7 +25061,7 @@
       </p:sp>
       <p:pic>
         <p:nvPicPr>
-          <p:cNvPr id="505" name="Google Shape;505;p39"/>
+          <p:cNvPr id="506" name="Google Shape;506;p39"/>
           <p:cNvPicPr preferRelativeResize="0"/>
           <p:nvPr/>
         </p:nvPicPr>
@@ -24862,7 +25100,7 @@
   <p:cSld>
     <p:spTree>
       <p:nvGrpSpPr>
-        <p:cNvPr id="509" name="Shape 509"/>
+        <p:cNvPr id="510" name="Shape 510"/>
         <p:cNvGrpSpPr/>
         <p:nvPr/>
       </p:nvGrpSpPr>
@@ -24876,7 +25114,7 @@
       </p:grpSpPr>
       <p:sp>
         <p:nvSpPr>
-          <p:cNvPr id="510" name="Google Shape;510;p40"/>
+          <p:cNvPr id="511" name="Google Shape;511;p40"/>
           <p:cNvSpPr txBox="1"/>
           <p:nvPr>
             <p:ph type="title"/>
@@ -24916,7 +25154,7 @@
       </p:sp>
       <p:sp>
         <p:nvSpPr>
-          <p:cNvPr id="511" name="Google Shape;511;p40"/>
+          <p:cNvPr id="512" name="Google Shape;512;p40"/>
           <p:cNvSpPr txBox="1"/>
           <p:nvPr>
             <p:ph idx="1" type="body"/>
@@ -25012,19 +25250,7 @@
             </a:r>
             <a:r>
               <a:rPr lang="en"/>
-              <a:t>variance</a:t>
-            </a:r>
-            <a:r>
-              <a:rPr lang="en"/>
-              <a:t> isn’t </a:t>
-            </a:r>
-            <a:r>
-              <a:rPr lang="en"/>
-              <a:t>sufficiently</a:t>
-            </a:r>
-            <a:r>
-              <a:rPr lang="en"/>
-              <a:t> equal</a:t>
+              <a:t>variances are unequal</a:t>
             </a:r>
             <a:endParaRPr/>
           </a:p>
@@ -25062,15 +25288,7 @@
             </a:pPr>
             <a:r>
               <a:rPr lang="en"/>
-              <a:t>If response variable is weirdly </a:t>
-            </a:r>
-            <a:r>
-              <a:rPr lang="en"/>
-              <a:t>distributed</a:t>
-            </a:r>
-            <a:r>
-              <a:rPr lang="en"/>
-              <a:t>, it may be best to use another model</a:t>
+              <a:t>If response variable is highly non-normal, it may be best to use another model</a:t>
             </a:r>
             <a:endParaRPr/>
           </a:p>
@@ -25089,7 +25307,7 @@
   <p:cSld>
     <p:spTree>
       <p:nvGrpSpPr>
-        <p:cNvPr id="515" name="Shape 515"/>
+        <p:cNvPr id="516" name="Shape 516"/>
         <p:cNvGrpSpPr/>
         <p:nvPr/>
       </p:nvGrpSpPr>
@@ -25103,7 +25321,7 @@
       </p:grpSpPr>
       <p:sp>
         <p:nvSpPr>
-          <p:cNvPr id="516" name="Google Shape;516;p41"/>
+          <p:cNvPr id="517" name="Google Shape;517;p41"/>
           <p:cNvSpPr txBox="1"/>
           <p:nvPr>
             <p:ph type="title"/>
@@ -25143,7 +25361,7 @@
       </p:sp>
       <p:sp>
         <p:nvSpPr>
-          <p:cNvPr id="517" name="Google Shape;517;p41"/>
+          <p:cNvPr id="518" name="Google Shape;518;p41"/>
           <p:cNvSpPr txBox="1"/>
           <p:nvPr>
             <p:ph idx="1" type="body"/>
@@ -25169,13 +25387,49 @@
                 <a:spcPts val="0"/>
               </a:spcBef>
               <a:spcAft>
-                <a:spcPts val="1200"/>
+                <a:spcPts val="0"/>
               </a:spcAft>
               <a:buNone/>
             </a:pPr>
             <a:r>
               <a:rPr lang="en"/>
-              <a:t>If observations are paired, like with T-test, use repeated measures ANOVA</a:t>
+              <a:t>If observations are paired, like with T-test, use repeated measures ANOVA instead of one-way</a:t>
+            </a:r>
+            <a:endParaRPr/>
+          </a:p>
+          <a:p>
+            <a:pPr indent="0" lvl="0" marL="0" rtl="0" algn="l">
+              <a:spcBef>
+                <a:spcPts val="1200"/>
+              </a:spcBef>
+              <a:spcAft>
+                <a:spcPts val="0"/>
+              </a:spcAft>
+              <a:buNone/>
+            </a:pPr>
+            <a:r>
+              <a:rPr lang="en"/>
+              <a:t>Standard ANOVA assumes </a:t>
+            </a:r>
+            <a:r>
+              <a:rPr lang="en"/>
+              <a:t>independence, so it’s wrong!</a:t>
+            </a:r>
+            <a:endParaRPr/>
+          </a:p>
+          <a:p>
+            <a:pPr indent="0" lvl="0" marL="0" rtl="0" algn="l">
+              <a:spcBef>
+                <a:spcPts val="1200"/>
+              </a:spcBef>
+              <a:spcAft>
+                <a:spcPts val="1200"/>
+              </a:spcAft>
+              <a:buNone/>
+            </a:pPr>
+            <a:r>
+              <a:rPr lang="en"/>
+              <a:t>Each object has its own baseline</a:t>
             </a:r>
             <a:endParaRPr/>
           </a:p>
@@ -25328,15 +25582,7 @@
             </a:pPr>
             <a:r>
               <a:rPr lang="en" sz="1800"/>
-              <a:t>ANOVA also takes into </a:t>
-            </a:r>
-            <a:r>
-              <a:rPr lang="en" sz="1800"/>
-              <a:t>account</a:t>
-            </a:r>
-            <a:r>
-              <a:rPr lang="en" sz="1800"/>
-              <a:t> variance across all groups</a:t>
+              <a:t>ANOVA compares between-group variation to within-group variation</a:t>
             </a:r>
             <a:endParaRPr sz="1800"/>
           </a:p>
@@ -25677,6 +25923,178 @@
 </p:sld>
 </file>
 
+<file path=ppt/slides/slide30.xml><?xml version="1.0" encoding="utf-8"?>
+<p:sld xmlns:a="http://schemas.openxmlformats.org/drawingml/2006/main" xmlns:r="http://schemas.openxmlformats.org/officeDocument/2006/relationships" xmlns:mc="http://schemas.openxmlformats.org/markup-compatibility/2006" xmlns:mv="urn:schemas-microsoft-com:mac:vml" xmlns:p="http://schemas.openxmlformats.org/presentationml/2006/main" xmlns:c="http://schemas.openxmlformats.org/drawingml/2006/chart" xmlns:dgm="http://schemas.openxmlformats.org/drawingml/2006/diagram" xmlns:o="urn:schemas-microsoft-com:office:office" xmlns:v="urn:schemas-microsoft-com:vml" xmlns:pvml="urn:schemas-microsoft-com:office:powerpoint" xmlns:com="http://schemas.openxmlformats.org/drawingml/2006/compatibility" xmlns:p14="http://schemas.microsoft.com/office/powerpoint/2010/main" xmlns:p15="http://schemas.microsoft.com/office/powerpoint/2012/main" xmlns:ahyp="http://schemas.microsoft.com/office/drawing/2018/hyperlinkcolor">
+  <p:cSld>
+    <p:spTree>
+      <p:nvGrpSpPr>
+        <p:cNvPr id="522" name="Shape 522"/>
+        <p:cNvGrpSpPr/>
+        <p:nvPr/>
+      </p:nvGrpSpPr>
+      <p:grpSpPr>
+        <a:xfrm>
+          <a:off x="0" y="0"/>
+          <a:ext cx="0" cy="0"/>
+          <a:chOff x="0" y="0"/>
+          <a:chExt cx="0" cy="0"/>
+        </a:xfrm>
+      </p:grpSpPr>
+      <p:sp>
+        <p:nvSpPr>
+          <p:cNvPr id="523" name="Google Shape;523;p42"/>
+          <p:cNvSpPr txBox="1"/>
+          <p:nvPr>
+            <p:ph type="title"/>
+          </p:nvPr>
+        </p:nvSpPr>
+        <p:spPr>
+          <a:xfrm>
+            <a:off x="1303800" y="598575"/>
+            <a:ext cx="7030500" cy="999300"/>
+          </a:xfrm>
+          <a:prstGeom prst="rect">
+            <a:avLst/>
+          </a:prstGeom>
+        </p:spPr>
+        <p:txBody>
+          <a:bodyPr anchorCtr="0" anchor="t" bIns="91425" lIns="91425" spcFirstLastPara="1" rIns="91425" wrap="square" tIns="91425">
+            <a:normAutofit fontScale="90000"/>
+          </a:bodyPr>
+          <a:lstStyle/>
+          <a:p>
+            <a:pPr indent="0" lvl="0" marL="0" rtl="0" algn="l">
+              <a:spcBef>
+                <a:spcPts val="0"/>
+              </a:spcBef>
+              <a:spcAft>
+                <a:spcPts val="0"/>
+              </a:spcAft>
+              <a:buNone/>
+            </a:pPr>
+            <a:r>
+              <a:rPr lang="en"/>
+              <a:t>Strong Non-Normality / Ordinal Outcome</a:t>
+            </a:r>
+            <a:endParaRPr/>
+          </a:p>
+        </p:txBody>
+      </p:sp>
+      <p:sp>
+        <p:nvSpPr>
+          <p:cNvPr id="524" name="Google Shape;524;p42"/>
+          <p:cNvSpPr txBox="1"/>
+          <p:nvPr>
+            <p:ph idx="1" type="body"/>
+          </p:nvPr>
+        </p:nvSpPr>
+        <p:spPr>
+          <a:xfrm>
+            <a:off x="1303800" y="1990050"/>
+            <a:ext cx="7030500" cy="2541600"/>
+          </a:xfrm>
+          <a:prstGeom prst="rect">
+            <a:avLst/>
+          </a:prstGeom>
+        </p:spPr>
+        <p:txBody>
+          <a:bodyPr anchorCtr="0" anchor="t" bIns="91425" lIns="91425" spcFirstLastPara="1" rIns="91425" wrap="square" tIns="91425">
+            <a:normAutofit/>
+          </a:bodyPr>
+          <a:lstStyle/>
+          <a:p>
+            <a:pPr indent="0" lvl="0" marL="0" rtl="0" algn="l">
+              <a:spcBef>
+                <a:spcPts val="0"/>
+              </a:spcBef>
+              <a:spcAft>
+                <a:spcPts val="0"/>
+              </a:spcAft>
+              <a:buNone/>
+            </a:pPr>
+            <a:r>
+              <a:rPr lang="en"/>
+              <a:t>Used Kruskal-Wallis as the non-parametric version of one-way ANOVA</a:t>
+            </a:r>
+            <a:endParaRPr/>
+          </a:p>
+          <a:p>
+            <a:pPr indent="0" lvl="0" marL="0" rtl="0" algn="l">
+              <a:spcBef>
+                <a:spcPts val="1200"/>
+              </a:spcBef>
+              <a:spcAft>
+                <a:spcPts val="0"/>
+              </a:spcAft>
+              <a:buNone/>
+            </a:pPr>
+            <a:r>
+              <a:rPr lang="en"/>
+              <a:t>H0: All groups come from same </a:t>
+            </a:r>
+            <a:r>
+              <a:rPr lang="en"/>
+              <a:t>distribution</a:t>
+            </a:r>
+            <a:endParaRPr/>
+          </a:p>
+          <a:p>
+            <a:pPr indent="0" lvl="0" marL="0" rtl="0" algn="l">
+              <a:spcBef>
+                <a:spcPts val="1200"/>
+              </a:spcBef>
+              <a:spcAft>
+                <a:spcPts val="0"/>
+              </a:spcAft>
+              <a:buNone/>
+            </a:pPr>
+            <a:r>
+              <a:rPr lang="en"/>
+              <a:t>HA: At least one group differs</a:t>
+            </a:r>
+            <a:endParaRPr/>
+          </a:p>
+          <a:p>
+            <a:pPr indent="0" lvl="0" marL="0" rtl="0" algn="l">
+              <a:spcBef>
+                <a:spcPts val="1200"/>
+              </a:spcBef>
+              <a:spcAft>
+                <a:spcPts val="0"/>
+              </a:spcAft>
+              <a:buNone/>
+            </a:pPr>
+            <a:r>
+              <a:rPr lang="en"/>
+              <a:t>Often interpreted as median differences </a:t>
+            </a:r>
+            <a:endParaRPr/>
+          </a:p>
+          <a:p>
+            <a:pPr indent="0" lvl="0" marL="0" rtl="0" algn="l">
+              <a:spcBef>
+                <a:spcPts val="1200"/>
+              </a:spcBef>
+              <a:spcAft>
+                <a:spcPts val="1200"/>
+              </a:spcAft>
+              <a:buNone/>
+            </a:pPr>
+            <a:r>
+              <a:t/>
+            </a:r>
+            <a:endParaRPr/>
+          </a:p>
+        </p:txBody>
+      </p:sp>
+    </p:spTree>
+  </p:cSld>
+  <p:clrMapOvr>
+    <a:masterClrMapping/>
+  </p:clrMapOvr>
+</p:sld>
+</file>
+
 <file path=ppt/slides/slide4.xml><?xml version="1.0" encoding="utf-8"?>
 <p:sld xmlns:a="http://schemas.openxmlformats.org/drawingml/2006/main" xmlns:r="http://schemas.openxmlformats.org/officeDocument/2006/relationships" xmlns:mc="http://schemas.openxmlformats.org/markup-compatibility/2006" xmlns:mv="urn:schemas-microsoft-com:mac:vml" xmlns:p="http://schemas.openxmlformats.org/presentationml/2006/main" xmlns:c="http://schemas.openxmlformats.org/drawingml/2006/chart" xmlns:dgm="http://schemas.openxmlformats.org/drawingml/2006/diagram" xmlns:o="urn:schemas-microsoft-com:office:office" xmlns:v="urn:schemas-microsoft-com:vml" xmlns:pvml="urn:schemas-microsoft-com:office:powerpoint" xmlns:com="http://schemas.openxmlformats.org/drawingml/2006/compatibility" xmlns:p14="http://schemas.microsoft.com/office/powerpoint/2010/main" xmlns:p15="http://schemas.microsoft.com/office/powerpoint/2012/main" xmlns:ahyp="http://schemas.microsoft.com/office/drawing/2018/hyperlinkcolor">
   <p:cSld>
@@ -25753,18 +26171,18 @@
         </p:spPr>
         <p:txBody>
           <a:bodyPr anchorCtr="0" anchor="t" bIns="91425" lIns="91425" spcFirstLastPara="1" rIns="91425" wrap="square" tIns="91425">
-            <a:normAutofit/>
+            <a:normAutofit fontScale="92500" lnSpcReduction="20000"/>
           </a:bodyPr>
           <a:lstStyle/>
           <a:p>
-            <a:pPr indent="-336550" lvl="0" marL="457200" rtl="0" algn="l">
-              <a:spcBef>
-                <a:spcPts val="0"/>
-              </a:spcBef>
-              <a:spcAft>
-                <a:spcPts val="0"/>
-              </a:spcAft>
-              <a:buSzPts val="1700"/>
+            <a:pPr indent="-328453" lvl="0" marL="457200" rtl="0" algn="l">
+              <a:spcBef>
+                <a:spcPts val="0"/>
+              </a:spcBef>
+              <a:spcAft>
+                <a:spcPts val="0"/>
+              </a:spcAft>
+              <a:buSzPct val="100000"/>
               <a:buAutoNum type="arabicParenR"/>
             </a:pPr>
             <a:r>
@@ -25782,14 +26200,14 @@
             <a:endParaRPr sz="1700"/>
           </a:p>
           <a:p>
-            <a:pPr indent="-336550" lvl="0" marL="457200" rtl="0" algn="l">
-              <a:spcBef>
-                <a:spcPts val="0"/>
-              </a:spcBef>
-              <a:spcAft>
-                <a:spcPts val="0"/>
-              </a:spcAft>
-              <a:buSzPts val="1700"/>
+            <a:pPr indent="-328453" lvl="0" marL="457200" rtl="0" algn="l">
+              <a:spcBef>
+                <a:spcPts val="0"/>
+              </a:spcBef>
+              <a:spcAft>
+                <a:spcPts val="0"/>
+              </a:spcAft>
+              <a:buSzPct val="100000"/>
               <a:buAutoNum type="arabicParenR"/>
             </a:pPr>
             <a:r>
@@ -25799,104 +26217,133 @@
             <a:endParaRPr sz="1700"/>
           </a:p>
           <a:p>
-            <a:pPr indent="-336550" lvl="0" marL="457200" rtl="0" algn="l">
-              <a:spcBef>
-                <a:spcPts val="0"/>
-              </a:spcBef>
-              <a:spcAft>
-                <a:spcPts val="0"/>
-              </a:spcAft>
-              <a:buSzPts val="1700"/>
+            <a:pPr indent="-328453" lvl="0" marL="457200" rtl="0" algn="l">
+              <a:spcBef>
+                <a:spcPts val="0"/>
+              </a:spcBef>
+              <a:spcAft>
+                <a:spcPts val="0"/>
+              </a:spcAft>
+              <a:buSzPct val="100000"/>
               <a:buAutoNum type="arabicParenR"/>
             </a:pPr>
             <a:r>
               <a:rPr lang="en" sz="1700"/>
-              <a:t>Check residual diagnostics for normality and variance patterns</a:t>
+              <a:t>Check assumptions </a:t>
             </a:r>
             <a:endParaRPr sz="1700"/>
           </a:p>
           <a:p>
-            <a:pPr indent="-336550" lvl="0" marL="457200" rtl="0" algn="l">
-              <a:spcBef>
-                <a:spcPts val="0"/>
-              </a:spcBef>
-              <a:spcAft>
-                <a:spcPts val="0"/>
-              </a:spcAft>
-              <a:buSzPts val="1700"/>
+            <a:pPr indent="-328453" lvl="0" marL="457200" rtl="0" algn="l">
+              <a:spcBef>
+                <a:spcPts val="0"/>
+              </a:spcBef>
+              <a:spcAft>
+                <a:spcPts val="0"/>
+              </a:spcAft>
+              <a:buSzPct val="100000"/>
               <a:buAutoNum type="arabicParenR"/>
             </a:pPr>
             <a:r>
               <a:rPr lang="en" sz="1700"/>
-              <a:t>Use Levene’s test to assess equal variances</a:t>
+              <a:t>Interpret F and p</a:t>
             </a:r>
             <a:endParaRPr sz="1700"/>
           </a:p>
           <a:p>
-            <a:pPr indent="-336550" lvl="0" marL="457200" rtl="0" algn="l">
-              <a:spcBef>
-                <a:spcPts val="0"/>
-              </a:spcBef>
-              <a:spcAft>
-                <a:spcPts val="0"/>
-              </a:spcAft>
-              <a:buSzPts val="1700"/>
+            <a:pPr indent="-328453" lvl="0" marL="457200" rtl="0" algn="l">
+              <a:spcBef>
+                <a:spcPts val="0"/>
+              </a:spcBef>
+              <a:spcAft>
+                <a:spcPts val="0"/>
+              </a:spcAft>
+              <a:buSzPct val="100000"/>
               <a:buAutoNum type="arabicParenR"/>
             </a:pPr>
             <a:r>
               <a:rPr lang="en" sz="1700"/>
-              <a:t>If assumptions are met, interpret F-statistic and p-value</a:t>
+              <a:t>Post hoc tests if needed</a:t>
             </a:r>
             <a:endParaRPr sz="1700"/>
           </a:p>
           <a:p>
-            <a:pPr indent="-336550" lvl="0" marL="457200" rtl="0" algn="l">
-              <a:spcBef>
-                <a:spcPts val="0"/>
-              </a:spcBef>
-              <a:spcAft>
-                <a:spcPts val="0"/>
-              </a:spcAft>
-              <a:buSzPts val="1700"/>
+            <a:pPr indent="-328453" lvl="0" marL="457200" rtl="0" algn="l">
+              <a:spcBef>
+                <a:spcPts val="0"/>
+              </a:spcBef>
+              <a:spcAft>
+                <a:spcPts val="0"/>
+              </a:spcAft>
+              <a:buSzPct val="100000"/>
               <a:buAutoNum type="arabicParenR"/>
             </a:pPr>
             <a:r>
               <a:rPr lang="en" sz="1700"/>
-              <a:t>If significant, run post hoc tests</a:t>
+              <a:t>Effect sizes</a:t>
             </a:r>
             <a:endParaRPr sz="1700"/>
           </a:p>
           <a:p>
-            <a:pPr indent="-336550" lvl="0" marL="457200" rtl="0" algn="l">
-              <a:spcBef>
-                <a:spcPts val="0"/>
-              </a:spcBef>
-              <a:spcAft>
-                <a:spcPts val="0"/>
-              </a:spcAft>
-              <a:buSzPts val="1700"/>
-              <a:buAutoNum type="arabicParenR"/>
-            </a:pPr>
-            <a:r>
-              <a:rPr lang="en" sz="1700"/>
-              <a:t>Compute effect sizes</a:t>
-            </a:r>
-            <a:endParaRPr sz="1700"/>
-          </a:p>
-          <a:p>
-            <a:pPr indent="-336550" lvl="0" marL="457200" rtl="0" algn="l">
-              <a:spcBef>
-                <a:spcPts val="0"/>
-              </a:spcBef>
-              <a:spcAft>
-                <a:spcPts val="0"/>
-              </a:spcAft>
-              <a:buSzPts val="1700"/>
+            <a:pPr indent="-328453" lvl="0" marL="457200" rtl="0" algn="l">
+              <a:spcBef>
+                <a:spcPts val="0"/>
+              </a:spcBef>
+              <a:spcAft>
+                <a:spcPts val="0"/>
+              </a:spcAft>
+              <a:buSzPct val="100000"/>
               <a:buAutoNum type="arabicParenR"/>
             </a:pPr>
             <a:r>
               <a:rPr lang="en" sz="1700"/>
               <a:t>Report results</a:t>
+            </a:r>
+            <a:endParaRPr sz="1700"/>
+          </a:p>
+          <a:p>
+            <a:pPr indent="0" lvl="0" marL="0" rtl="0" algn="l">
+              <a:spcBef>
+                <a:spcPts val="1200"/>
+              </a:spcBef>
+              <a:spcAft>
+                <a:spcPts val="0"/>
+              </a:spcAft>
+              <a:buNone/>
+            </a:pPr>
+            <a:r>
+              <a:t/>
+            </a:r>
+            <a:endParaRPr sz="1700"/>
+          </a:p>
+          <a:p>
+            <a:pPr indent="0" lvl="0" marL="0" rtl="0" algn="l">
+              <a:spcBef>
+                <a:spcPts val="1200"/>
+              </a:spcBef>
+              <a:spcAft>
+                <a:spcPts val="0"/>
+              </a:spcAft>
+              <a:buNone/>
+            </a:pPr>
+            <a:r>
+              <a:rPr lang="en" sz="1700"/>
+              <a:t>Transform or different test if assumptions aren’t met</a:t>
+            </a:r>
+            <a:endParaRPr sz="1700"/>
+          </a:p>
+          <a:p>
+            <a:pPr indent="0" lvl="0" marL="0" rtl="0" algn="l">
+              <a:spcBef>
+                <a:spcPts val="1200"/>
+              </a:spcBef>
+              <a:spcAft>
+                <a:spcPts val="1200"/>
+              </a:spcAft>
+              <a:buNone/>
+            </a:pPr>
+            <a:r>
+              <a:t/>
             </a:r>
             <a:endParaRPr sz="1700"/>
           </a:p>
@@ -26035,7 +26482,7 @@
             </a:pPr>
             <a:r>
               <a:rPr lang="en" sz="1800"/>
-              <a:t>Residuals within each group are approximately normal*</a:t>
+              <a:t>Residuals are approximately normally distributed</a:t>
             </a:r>
             <a:endParaRPr sz="1800"/>
           </a:p>
@@ -26165,7 +26612,7 @@
             </a:pPr>
             <a:r>
               <a:rPr lang="en"/>
-              <a:t>ANOVA </a:t>
+              <a:t>ANOVA One- vs Two-Way </a:t>
             </a:r>
             <a:endParaRPr/>
           </a:p>
@@ -26205,7 +26652,7 @@
             </a:pPr>
             <a:r>
               <a:rPr lang="en" sz="1600"/>
-              <a:t>One-Way ANOVA: </a:t>
+              <a:t>One-Way ANOVA: One categorical predictor</a:t>
             </a:r>
             <a:endParaRPr sz="1600"/>
           </a:p>
@@ -26221,15 +26668,7 @@
             </a:pPr>
             <a:r>
               <a:rPr lang="en" sz="1600"/>
-              <a:t>Used to test three or more group means for </a:t>
-            </a:r>
-            <a:r>
-              <a:rPr lang="en" sz="1600"/>
-              <a:t>differences</a:t>
-            </a:r>
-            <a:r>
-              <a:rPr lang="en" sz="1600"/>
-              <a:t> across a single factor</a:t>
+              <a:t>Example: Does income vary by major</a:t>
             </a:r>
             <a:endParaRPr sz="1600"/>
           </a:p>
@@ -26260,7 +26699,7 @@
             </a:pPr>
             <a:r>
               <a:rPr lang="en" sz="1600"/>
-              <a:t>Two-Way ANOVA: </a:t>
+              <a:t>Two-Way ANOVA:  Two categorical predictors, plus possible interaction</a:t>
             </a:r>
             <a:endParaRPr sz="1600"/>
           </a:p>
@@ -26276,7 +26715,7 @@
             </a:pPr>
             <a:r>
               <a:rPr lang="en" sz="1600"/>
-              <a:t>Used to test three or more group means for differences across two or more factors and their interaction</a:t>
+              <a:t>Example: Does income vary by major, school type, and does the effect of major vary by school type</a:t>
             </a:r>
             <a:endParaRPr sz="1600"/>
           </a:p>
@@ -26680,7 +27119,7 @@
             </a:pPr>
             <a:r>
               <a:rPr lang="en"/>
-              <a:t>Levene’s Test For Equal Variance </a:t>
+              <a:t>Levene’s Test For Equal Variances </a:t>
             </a:r>
             <a:endParaRPr/>
           </a:p>
@@ -26840,6 +27279,108 @@
           </a:p>
         </p:txBody>
       </p:sp>
+      <p:sp>
+        <p:nvSpPr>
+          <p:cNvPr id="321" name="Google Shape;321;p19"/>
+          <p:cNvSpPr txBox="1"/>
+          <p:nvPr/>
+        </p:nvSpPr>
+        <p:spPr>
+          <a:xfrm>
+            <a:off x="1063750" y="4622275"/>
+            <a:ext cx="4076700" cy="275400"/>
+          </a:xfrm>
+          <a:prstGeom prst="rect">
+            <a:avLst/>
+          </a:prstGeom>
+          <a:noFill/>
+          <a:ln>
+            <a:noFill/>
+          </a:ln>
+        </p:spPr>
+        <p:txBody>
+          <a:bodyPr anchorCtr="0" anchor="t" bIns="91425" lIns="91425" spcFirstLastPara="1" rIns="91425" wrap="square" tIns="91425">
+            <a:noAutofit/>
+          </a:bodyPr>
+          <a:lstStyle/>
+          <a:p>
+            <a:pPr indent="0" lvl="0" marL="0" rtl="0" algn="l">
+              <a:spcBef>
+                <a:spcPts val="0"/>
+              </a:spcBef>
+              <a:spcAft>
+                <a:spcPts val="0"/>
+              </a:spcAft>
+              <a:buNone/>
+            </a:pPr>
+            <a:r>
+              <a:rPr lang="en" sz="1300">
+                <a:solidFill>
+                  <a:schemeClr val="dk2"/>
+                </a:solidFill>
+                <a:latin typeface="Nunito"/>
+                <a:ea typeface="Nunito"/>
+                <a:cs typeface="Nunito"/>
+                <a:sym typeface="Nunito"/>
+              </a:rPr>
+              <a:t>H0: Group variances </a:t>
+            </a:r>
+            <a:r>
+              <a:rPr lang="en" sz="1300">
+                <a:solidFill>
+                  <a:schemeClr val="dk2"/>
+                </a:solidFill>
+                <a:latin typeface="Nunito"/>
+                <a:ea typeface="Nunito"/>
+                <a:cs typeface="Nunito"/>
+                <a:sym typeface="Nunito"/>
+              </a:rPr>
+              <a:t>are equal</a:t>
+            </a:r>
+            <a:endParaRPr sz="1300">
+              <a:solidFill>
+                <a:schemeClr val="dk2"/>
+              </a:solidFill>
+              <a:latin typeface="Nunito"/>
+              <a:ea typeface="Nunito"/>
+              <a:cs typeface="Nunito"/>
+              <a:sym typeface="Nunito"/>
+            </a:endParaRPr>
+          </a:p>
+          <a:p>
+            <a:pPr indent="0" lvl="0" marL="0" rtl="0" algn="l">
+              <a:spcBef>
+                <a:spcPts val="0"/>
+              </a:spcBef>
+              <a:spcAft>
+                <a:spcPts val="0"/>
+              </a:spcAft>
+              <a:buNone/>
+            </a:pPr>
+            <a:r>
+              <a:rPr lang="en" sz="1300">
+                <a:solidFill>
+                  <a:schemeClr val="dk2"/>
+                </a:solidFill>
+                <a:latin typeface="Nunito"/>
+                <a:ea typeface="Nunito"/>
+                <a:cs typeface="Nunito"/>
+                <a:sym typeface="Nunito"/>
+              </a:rPr>
+              <a:t>HA: At least one group variance differs</a:t>
+            </a:r>
+            <a:endParaRPr sz="1300">
+              <a:solidFill>
+                <a:schemeClr val="dk2"/>
+              </a:solidFill>
+              <a:latin typeface="Nunito"/>
+              <a:ea typeface="Nunito"/>
+              <a:cs typeface="Nunito"/>
+              <a:sym typeface="Nunito"/>
+            </a:endParaRPr>
+          </a:p>
+        </p:txBody>
+      </p:sp>
     </p:spTree>
   </p:cSld>
   <p:clrMapOvr>
@@ -26853,7 +27394,7 @@
   <p:cSld>
     <p:spTree>
       <p:nvGrpSpPr>
-        <p:cNvPr id="324" name="Shape 324"/>
+        <p:cNvPr id="325" name="Shape 325"/>
         <p:cNvGrpSpPr/>
         <p:nvPr/>
       </p:nvGrpSpPr>
@@ -26867,7 +27408,7 @@
       </p:grpSpPr>
       <p:sp>
         <p:nvSpPr>
-          <p:cNvPr id="325" name="Google Shape;325;p20"/>
+          <p:cNvPr id="326" name="Google Shape;326;p20"/>
           <p:cNvSpPr txBox="1"/>
           <p:nvPr>
             <p:ph type="title"/>
@@ -26907,7 +27448,7 @@
       </p:sp>
       <p:sp>
         <p:nvSpPr>
-          <p:cNvPr id="326" name="Google Shape;326;p20"/>
+          <p:cNvPr id="327" name="Google Shape;327;p20"/>
           <p:cNvSpPr txBox="1"/>
           <p:nvPr>
             <p:ph idx="1" type="body"/>
@@ -26962,7 +27503,7 @@
       </p:sp>
       <p:grpSp>
         <p:nvGrpSpPr>
-          <p:cNvPr id="327" name="Google Shape;327;p20"/>
+          <p:cNvPr id="328" name="Google Shape;328;p20"/>
           <p:cNvGrpSpPr/>
           <p:nvPr/>
         </p:nvGrpSpPr>
@@ -26976,7 +27517,7 @@
         </p:grpSpPr>
         <p:sp>
           <p:nvSpPr>
-            <p:cNvPr id="328" name="Google Shape;328;p20"/>
+            <p:cNvPr id="329" name="Google Shape;329;p20"/>
             <p:cNvSpPr/>
             <p:nvPr/>
           </p:nvSpPr>
@@ -27086,7 +27627,7 @@
         </p:sp>
         <p:sp>
           <p:nvSpPr>
-            <p:cNvPr id="329" name="Google Shape;329;p20"/>
+            <p:cNvPr id="330" name="Google Shape;330;p20"/>
             <p:cNvSpPr/>
             <p:nvPr/>
           </p:nvSpPr>
@@ -27196,7 +27737,7 @@
         </p:sp>
         <p:sp>
           <p:nvSpPr>
-            <p:cNvPr id="330" name="Google Shape;330;p20"/>
+            <p:cNvPr id="331" name="Google Shape;331;p20"/>
             <p:cNvSpPr/>
             <p:nvPr/>
           </p:nvSpPr>
@@ -27306,7 +27847,7 @@
         </p:sp>
         <p:sp>
           <p:nvSpPr>
-            <p:cNvPr id="331" name="Google Shape;331;p20"/>
+            <p:cNvPr id="332" name="Google Shape;332;p20"/>
             <p:cNvSpPr/>
             <p:nvPr/>
           </p:nvSpPr>
@@ -27416,7 +27957,7 @@
         </p:sp>
         <p:sp>
           <p:nvSpPr>
-            <p:cNvPr id="332" name="Google Shape;332;p20"/>
+            <p:cNvPr id="333" name="Google Shape;333;p20"/>
             <p:cNvSpPr/>
             <p:nvPr/>
           </p:nvSpPr>
@@ -27526,7 +28067,7 @@
         </p:sp>
         <p:sp>
           <p:nvSpPr>
-            <p:cNvPr id="333" name="Google Shape;333;p20"/>
+            <p:cNvPr id="334" name="Google Shape;334;p20"/>
             <p:cNvSpPr/>
             <p:nvPr/>
           </p:nvSpPr>
@@ -27636,7 +28177,7 @@
         </p:sp>
         <p:cxnSp>
           <p:nvCxnSpPr>
-            <p:cNvPr id="334" name="Google Shape;334;p20"/>
+            <p:cNvPr id="335" name="Google Shape;335;p20"/>
             <p:cNvCxnSpPr/>
             <p:nvPr/>
           </p:nvCxnSpPr>
@@ -27662,7 +28203,7 @@
         </p:cxnSp>
         <p:cxnSp>
           <p:nvCxnSpPr>
-            <p:cNvPr id="335" name="Google Shape;335;p20"/>
+            <p:cNvPr id="336" name="Google Shape;336;p20"/>
             <p:cNvCxnSpPr/>
             <p:nvPr/>
           </p:nvCxnSpPr>
@@ -27689,7 +28230,7 @@
       </p:grpSp>
       <p:sp>
         <p:nvSpPr>
-          <p:cNvPr id="336" name="Google Shape;336;p20"/>
+          <p:cNvPr id="337" name="Google Shape;337;p20"/>
           <p:cNvSpPr/>
           <p:nvPr/>
         </p:nvSpPr>
@@ -27799,7 +28340,7 @@
       </p:sp>
       <p:sp>
         <p:nvSpPr>
-          <p:cNvPr id="337" name="Google Shape;337;p20"/>
+          <p:cNvPr id="338" name="Google Shape;338;p20"/>
           <p:cNvSpPr/>
           <p:nvPr/>
         </p:nvSpPr>
@@ -27909,7 +28450,7 @@
       </p:sp>
       <p:sp>
         <p:nvSpPr>
-          <p:cNvPr id="338" name="Google Shape;338;p20"/>
+          <p:cNvPr id="339" name="Google Shape;339;p20"/>
           <p:cNvSpPr/>
           <p:nvPr/>
         </p:nvSpPr>
@@ -28019,7 +28560,7 @@
       </p:sp>
       <p:sp>
         <p:nvSpPr>
-          <p:cNvPr id="339" name="Google Shape;339;p20"/>
+          <p:cNvPr id="340" name="Google Shape;340;p20"/>
           <p:cNvSpPr/>
           <p:nvPr/>
         </p:nvSpPr>
@@ -28129,7 +28670,7 @@
       </p:sp>
       <p:sp>
         <p:nvSpPr>
-          <p:cNvPr id="340" name="Google Shape;340;p20"/>
+          <p:cNvPr id="341" name="Google Shape;341;p20"/>
           <p:cNvSpPr/>
           <p:nvPr/>
         </p:nvSpPr>
@@ -28239,7 +28780,7 @@
       </p:sp>
       <p:sp>
         <p:nvSpPr>
-          <p:cNvPr id="341" name="Google Shape;341;p20"/>
+          <p:cNvPr id="342" name="Google Shape;342;p20"/>
           <p:cNvSpPr/>
           <p:nvPr/>
         </p:nvSpPr>
@@ -28349,7 +28890,7 @@
       </p:sp>
       <p:sp>
         <p:nvSpPr>
-          <p:cNvPr id="342" name="Google Shape;342;p20"/>
+          <p:cNvPr id="343" name="Google Shape;343;p20"/>
           <p:cNvSpPr/>
           <p:nvPr/>
         </p:nvSpPr>
@@ -28459,7 +29000,7 @@
       </p:sp>
       <p:sp>
         <p:nvSpPr>
-          <p:cNvPr id="343" name="Google Shape;343;p20"/>
+          <p:cNvPr id="344" name="Google Shape;344;p20"/>
           <p:cNvSpPr/>
           <p:nvPr/>
         </p:nvSpPr>
@@ -28569,7 +29110,7 @@
       </p:sp>
       <p:sp>
         <p:nvSpPr>
-          <p:cNvPr id="344" name="Google Shape;344;p20"/>
+          <p:cNvPr id="345" name="Google Shape;345;p20"/>
           <p:cNvSpPr/>
           <p:nvPr/>
         </p:nvSpPr>
@@ -28679,7 +29220,7 @@
       </p:sp>
       <p:sp>
         <p:nvSpPr>
-          <p:cNvPr id="345" name="Google Shape;345;p20"/>
+          <p:cNvPr id="346" name="Google Shape;346;p20"/>
           <p:cNvSpPr/>
           <p:nvPr/>
         </p:nvSpPr>
@@ -28789,7 +29330,7 @@
       </p:sp>
       <p:sp>
         <p:nvSpPr>
-          <p:cNvPr id="346" name="Google Shape;346;p20"/>
+          <p:cNvPr id="347" name="Google Shape;347;p20"/>
           <p:cNvSpPr/>
           <p:nvPr/>
         </p:nvSpPr>
@@ -28899,7 +29440,7 @@
       </p:sp>
       <p:sp>
         <p:nvSpPr>
-          <p:cNvPr id="347" name="Google Shape;347;p20"/>
+          <p:cNvPr id="348" name="Google Shape;348;p20"/>
           <p:cNvSpPr/>
           <p:nvPr/>
         </p:nvSpPr>
@@ -29009,7 +29550,7 @@
       </p:sp>
       <p:sp>
         <p:nvSpPr>
-          <p:cNvPr id="348" name="Google Shape;348;p20"/>
+          <p:cNvPr id="349" name="Google Shape;349;p20"/>
           <p:cNvSpPr txBox="1"/>
           <p:nvPr>
             <p:ph idx="1" type="body"/>
@@ -29049,7 +29590,7 @@
       </p:sp>
       <p:sp>
         <p:nvSpPr>
-          <p:cNvPr id="349" name="Google Shape;349;p20"/>
+          <p:cNvPr id="350" name="Google Shape;350;p20"/>
           <p:cNvSpPr txBox="1"/>
           <p:nvPr/>
         </p:nvSpPr>
@@ -29118,7 +29659,7 @@
   <p:cSld>
     <p:spTree>
       <p:nvGrpSpPr>
-        <p:cNvPr id="353" name="Shape 353"/>
+        <p:cNvPr id="354" name="Shape 354"/>
         <p:cNvGrpSpPr/>
         <p:nvPr/>
       </p:nvGrpSpPr>
@@ -29132,7 +29673,7 @@
       </p:grpSpPr>
       <p:sp>
         <p:nvSpPr>
-          <p:cNvPr id="354" name="Google Shape;354;p21"/>
+          <p:cNvPr id="355" name="Google Shape;355;p21"/>
           <p:cNvSpPr txBox="1"/>
           <p:nvPr>
             <p:ph type="title"/>
@@ -29188,7 +29729,7 @@
       </p:sp>
       <p:sp>
         <p:nvSpPr>
-          <p:cNvPr id="355" name="Google Shape;355;p21"/>
+          <p:cNvPr id="356" name="Google Shape;356;p21"/>
           <p:cNvSpPr txBox="1"/>
           <p:nvPr>
             <p:ph idx="1" type="body"/>
@@ -29205,7 +29746,7 @@
         </p:spPr>
         <p:txBody>
           <a:bodyPr anchorCtr="0" anchor="t" bIns="91425" lIns="91425" spcFirstLastPara="1" rIns="91425" wrap="square" tIns="91425">
-            <a:normAutofit/>
+            <a:normAutofit lnSpcReduction="10000"/>
           </a:bodyPr>
           <a:lstStyle/>
           <a:p>
@@ -29337,6 +29878,38 @@
               <a:buNone/>
             </a:pPr>
             <a:r>
+              <a:rPr lang="en" sz="1100"/>
+              <a:t>This is within-group variation</a:t>
+            </a:r>
+            <a:endParaRPr sz="1100"/>
+          </a:p>
+          <a:p>
+            <a:pPr indent="0" lvl="0" marL="0" rtl="0" algn="l">
+              <a:spcBef>
+                <a:spcPts val="1200"/>
+              </a:spcBef>
+              <a:spcAft>
+                <a:spcPts val="0"/>
+              </a:spcAft>
+              <a:buNone/>
+            </a:pPr>
+            <a:r>
+              <a:rPr lang="en" sz="1100"/>
+              <a:t>SSW = Unexplained / residual</a:t>
+            </a:r>
+            <a:endParaRPr sz="1100"/>
+          </a:p>
+          <a:p>
+            <a:pPr indent="0" lvl="0" marL="0" rtl="0" algn="l">
+              <a:spcBef>
+                <a:spcPts val="1200"/>
+              </a:spcBef>
+              <a:spcAft>
+                <a:spcPts val="0"/>
+              </a:spcAft>
+              <a:buNone/>
+            </a:pPr>
+            <a:r>
               <a:t/>
             </a:r>
             <a:endParaRPr/>
@@ -29360,7 +29933,7 @@
       </p:sp>
       <p:sp>
         <p:nvSpPr>
-          <p:cNvPr id="356" name="Google Shape;356;p21"/>
+          <p:cNvPr id="357" name="Google Shape;357;p21"/>
           <p:cNvSpPr txBox="1"/>
           <p:nvPr>
             <p:ph idx="1" type="body"/>
@@ -29377,7 +29950,7 @@
         </p:spPr>
         <p:txBody>
           <a:bodyPr anchorCtr="0" anchor="t" bIns="91425" lIns="91425" spcFirstLastPara="1" rIns="91425" wrap="square" tIns="91425">
-            <a:normAutofit fontScale="85000" lnSpcReduction="20000"/>
+            <a:normAutofit fontScale="77500" lnSpcReduction="20000"/>
           </a:bodyPr>
           <a:lstStyle/>
           <a:p>
@@ -29431,7 +30004,7 @@
             <a:endParaRPr/>
           </a:p>
           <a:p>
-            <a:pPr indent="-298767" lvl="0" marL="457200" rtl="0" algn="l">
+            <a:pPr indent="-292576" lvl="0" marL="457200" rtl="0" algn="l">
               <a:spcBef>
                 <a:spcPts val="1200"/>
               </a:spcBef>
@@ -29448,7 +30021,7 @@
             <a:endParaRPr/>
           </a:p>
           <a:p>
-            <a:pPr indent="-298767" lvl="0" marL="457200" rtl="0" algn="l">
+            <a:pPr indent="-292576" lvl="0" marL="457200" rtl="0" algn="l">
               <a:spcBef>
                 <a:spcPts val="0"/>
               </a:spcBef>
@@ -29469,7 +30042,7 @@
             <a:endParaRPr/>
           </a:p>
           <a:p>
-            <a:pPr indent="-298767" lvl="0" marL="457200" rtl="0" algn="l">
+            <a:pPr indent="-292576" lvl="0" marL="457200" rtl="0" algn="l">
               <a:spcBef>
                 <a:spcPts val="0"/>
               </a:spcBef>
@@ -29486,7 +30059,7 @@
             <a:endParaRPr/>
           </a:p>
           <a:p>
-            <a:pPr indent="-298767" lvl="0" marL="457200" rtl="0" algn="l">
+            <a:pPr indent="-292576" lvl="0" marL="457200" rtl="0" algn="l">
               <a:spcBef>
                 <a:spcPts val="0"/>
               </a:spcBef>
@@ -29503,7 +30076,7 @@
             <a:endParaRPr/>
           </a:p>
           <a:p>
-            <a:pPr indent="-298767" lvl="0" marL="457200" rtl="0" algn="l">
+            <a:pPr indent="-292576" lvl="0" marL="457200" rtl="0" algn="l">
               <a:spcBef>
                 <a:spcPts val="0"/>
               </a:spcBef>
@@ -29520,7 +30093,7 @@
             <a:endParaRPr/>
           </a:p>
           <a:p>
-            <a:pPr indent="-298767" lvl="0" marL="457200" rtl="0" algn="l">
+            <a:pPr indent="-292576" lvl="0" marL="457200" rtl="0" algn="l">
               <a:spcBef>
                 <a:spcPts val="0"/>
               </a:spcBef>
@@ -29547,6 +30120,38 @@
               <a:buNone/>
             </a:pPr>
             <a:r>
+              <a:rPr lang="en"/>
+              <a:t>This is between group variation</a:t>
+            </a:r>
+            <a:endParaRPr/>
+          </a:p>
+          <a:p>
+            <a:pPr indent="0" lvl="0" marL="0" rtl="0" algn="l">
+              <a:spcBef>
+                <a:spcPts val="1200"/>
+              </a:spcBef>
+              <a:spcAft>
+                <a:spcPts val="0"/>
+              </a:spcAft>
+              <a:buNone/>
+            </a:pPr>
+            <a:r>
+              <a:rPr lang="en"/>
+              <a:t>SSA = Explained by group membership</a:t>
+            </a:r>
+            <a:endParaRPr/>
+          </a:p>
+          <a:p>
+            <a:pPr indent="0" lvl="0" marL="0" rtl="0" algn="l">
+              <a:spcBef>
+                <a:spcPts val="1200"/>
+              </a:spcBef>
+              <a:spcAft>
+                <a:spcPts val="0"/>
+              </a:spcAft>
+              <a:buNone/>
+            </a:pPr>
+            <a:r>
               <a:t/>
             </a:r>
             <a:endParaRPr/>
@@ -29570,7 +30175,7 @@
       </p:sp>
       <p:sp>
         <p:nvSpPr>
-          <p:cNvPr id="357" name="Google Shape;357;p21"/>
+          <p:cNvPr id="358" name="Google Shape;358;p21"/>
           <p:cNvSpPr txBox="1"/>
           <p:nvPr>
             <p:ph type="title"/>
@@ -29602,10 +30207,26 @@
               <a:buNone/>
             </a:pPr>
             <a:r>
-              <a:rPr lang="en" sz="2100"/>
+              <a:rPr lang="en" sz="1500"/>
               <a:t>Total Variation (SST) = Within Group Variation (SSW) + Among Group Variation (SSA)</a:t>
             </a:r>
-            <a:endParaRPr sz="2100"/>
+            <a:endParaRPr sz="1500"/>
+          </a:p>
+          <a:p>
+            <a:pPr indent="0" lvl="0" marL="0" rtl="0" algn="l">
+              <a:spcBef>
+                <a:spcPts val="0"/>
+              </a:spcBef>
+              <a:spcAft>
+                <a:spcPts val="0"/>
+              </a:spcAft>
+              <a:buSzPts val="990"/>
+              <a:buNone/>
+            </a:pPr>
+            <a:r>
+              <a:t/>
+            </a:r>
+            <a:endParaRPr sz="1500"/>
           </a:p>
           <a:p>
             <a:pPr indent="0" lvl="0" marL="0" rtl="0" algn="l">
@@ -29639,398 +30260,6 @@
             <p:seq concurrent="1" nextAc="seek">
               <p:cTn dur="indefinite" id="2" nodeType="mainSeq">
                 <p:childTnLst>
-                  <p:par>
-                    <p:cTn fill="hold">
-                      <p:stCondLst>
-                        <p:cond delay="indefinite"/>
-                      </p:stCondLst>
-                      <p:childTnLst>
-                        <p:par>
-                          <p:cTn fill="hold">
-                            <p:stCondLst>
-                              <p:cond delay="0"/>
-                            </p:stCondLst>
-                            <p:childTnLst>
-                              <p:par>
-                                <p:cTn fill="hold" nodeType="clickEffect" presetClass="entr" presetID="1" presetSubtype="0">
-                                  <p:stCondLst>
-                                    <p:cond delay="0"/>
-                                  </p:stCondLst>
-                                  <p:childTnLst>
-                                    <p:set>
-                                      <p:cBhvr>
-                                        <p:cTn dur="1" fill="hold">
-                                          <p:stCondLst>
-                                            <p:cond delay="0"/>
-                                          </p:stCondLst>
-                                        </p:cTn>
-                                        <p:tgtEl>
-                                          <p:spTgt spid="355">
-                                            <p:txEl>
-                                              <p:pRg end="0" st="0"/>
-                                            </p:txEl>
-                                          </p:spTgt>
-                                        </p:tgtEl>
-                                        <p:attrNameLst>
-                                          <p:attrName>style.visibility</p:attrName>
-                                        </p:attrNameLst>
-                                      </p:cBhvr>
-                                      <p:to>
-                                        <p:strVal val="visible"/>
-                                      </p:to>
-                                    </p:set>
-                                  </p:childTnLst>
-                                </p:cTn>
-                              </p:par>
-                            </p:childTnLst>
-                          </p:cTn>
-                        </p:par>
-                      </p:childTnLst>
-                    </p:cTn>
-                  </p:par>
-                  <p:par>
-                    <p:cTn fill="hold">
-                      <p:stCondLst>
-                        <p:cond delay="indefinite"/>
-                      </p:stCondLst>
-                      <p:childTnLst>
-                        <p:par>
-                          <p:cTn fill="hold">
-                            <p:stCondLst>
-                              <p:cond delay="0"/>
-                            </p:stCondLst>
-                            <p:childTnLst>
-                              <p:par>
-                                <p:cTn fill="hold" nodeType="clickEffect" presetClass="entr" presetID="1" presetSubtype="0">
-                                  <p:stCondLst>
-                                    <p:cond delay="0"/>
-                                  </p:stCondLst>
-                                  <p:childTnLst>
-                                    <p:set>
-                                      <p:cBhvr>
-                                        <p:cTn dur="1" fill="hold">
-                                          <p:stCondLst>
-                                            <p:cond delay="0"/>
-                                          </p:stCondLst>
-                                        </p:cTn>
-                                        <p:tgtEl>
-                                          <p:spTgt spid="355">
-                                            <p:txEl>
-                                              <p:pRg end="1" st="1"/>
-                                            </p:txEl>
-                                          </p:spTgt>
-                                        </p:tgtEl>
-                                        <p:attrNameLst>
-                                          <p:attrName>style.visibility</p:attrName>
-                                        </p:attrNameLst>
-                                      </p:cBhvr>
-                                      <p:to>
-                                        <p:strVal val="visible"/>
-                                      </p:to>
-                                    </p:set>
-                                  </p:childTnLst>
-                                </p:cTn>
-                              </p:par>
-                            </p:childTnLst>
-                          </p:cTn>
-                        </p:par>
-                      </p:childTnLst>
-                    </p:cTn>
-                  </p:par>
-                  <p:par>
-                    <p:cTn fill="hold">
-                      <p:stCondLst>
-                        <p:cond delay="indefinite"/>
-                      </p:stCondLst>
-                      <p:childTnLst>
-                        <p:par>
-                          <p:cTn fill="hold">
-                            <p:stCondLst>
-                              <p:cond delay="0"/>
-                            </p:stCondLst>
-                            <p:childTnLst>
-                              <p:par>
-                                <p:cTn fill="hold" nodeType="clickEffect" presetClass="entr" presetID="1" presetSubtype="0">
-                                  <p:stCondLst>
-                                    <p:cond delay="0"/>
-                                  </p:stCondLst>
-                                  <p:childTnLst>
-                                    <p:set>
-                                      <p:cBhvr>
-                                        <p:cTn dur="1" fill="hold">
-                                          <p:stCondLst>
-                                            <p:cond delay="0"/>
-                                          </p:stCondLst>
-                                        </p:cTn>
-                                        <p:tgtEl>
-                                          <p:spTgt spid="355">
-                                            <p:txEl>
-                                              <p:pRg end="2" st="2"/>
-                                            </p:txEl>
-                                          </p:spTgt>
-                                        </p:tgtEl>
-                                        <p:attrNameLst>
-                                          <p:attrName>style.visibility</p:attrName>
-                                        </p:attrNameLst>
-                                      </p:cBhvr>
-                                      <p:to>
-                                        <p:strVal val="visible"/>
-                                      </p:to>
-                                    </p:set>
-                                  </p:childTnLst>
-                                </p:cTn>
-                              </p:par>
-                            </p:childTnLst>
-                          </p:cTn>
-                        </p:par>
-                      </p:childTnLst>
-                    </p:cTn>
-                  </p:par>
-                  <p:par>
-                    <p:cTn fill="hold">
-                      <p:stCondLst>
-                        <p:cond delay="indefinite"/>
-                      </p:stCondLst>
-                      <p:childTnLst>
-                        <p:par>
-                          <p:cTn fill="hold">
-                            <p:stCondLst>
-                              <p:cond delay="0"/>
-                            </p:stCondLst>
-                            <p:childTnLst>
-                              <p:par>
-                                <p:cTn fill="hold" nodeType="clickEffect" presetClass="entr" presetID="1" presetSubtype="0">
-                                  <p:stCondLst>
-                                    <p:cond delay="0"/>
-                                  </p:stCondLst>
-                                  <p:childTnLst>
-                                    <p:set>
-                                      <p:cBhvr>
-                                        <p:cTn dur="1" fill="hold">
-                                          <p:stCondLst>
-                                            <p:cond delay="0"/>
-                                          </p:stCondLst>
-                                        </p:cTn>
-                                        <p:tgtEl>
-                                          <p:spTgt spid="355">
-                                            <p:txEl>
-                                              <p:pRg end="3" st="3"/>
-                                            </p:txEl>
-                                          </p:spTgt>
-                                        </p:tgtEl>
-                                        <p:attrNameLst>
-                                          <p:attrName>style.visibility</p:attrName>
-                                        </p:attrNameLst>
-                                      </p:cBhvr>
-                                      <p:to>
-                                        <p:strVal val="visible"/>
-                                      </p:to>
-                                    </p:set>
-                                  </p:childTnLst>
-                                </p:cTn>
-                              </p:par>
-                            </p:childTnLst>
-                          </p:cTn>
-                        </p:par>
-                      </p:childTnLst>
-                    </p:cTn>
-                  </p:par>
-                  <p:par>
-                    <p:cTn fill="hold">
-                      <p:stCondLst>
-                        <p:cond delay="indefinite"/>
-                      </p:stCondLst>
-                      <p:childTnLst>
-                        <p:par>
-                          <p:cTn fill="hold">
-                            <p:stCondLst>
-                              <p:cond delay="0"/>
-                            </p:stCondLst>
-                            <p:childTnLst>
-                              <p:par>
-                                <p:cTn fill="hold" nodeType="clickEffect" presetClass="entr" presetID="1" presetSubtype="0">
-                                  <p:stCondLst>
-                                    <p:cond delay="0"/>
-                                  </p:stCondLst>
-                                  <p:childTnLst>
-                                    <p:set>
-                                      <p:cBhvr>
-                                        <p:cTn dur="1" fill="hold">
-                                          <p:stCondLst>
-                                            <p:cond delay="0"/>
-                                          </p:stCondLst>
-                                        </p:cTn>
-                                        <p:tgtEl>
-                                          <p:spTgt spid="355">
-                                            <p:txEl>
-                                              <p:pRg end="4" st="4"/>
-                                            </p:txEl>
-                                          </p:spTgt>
-                                        </p:tgtEl>
-                                        <p:attrNameLst>
-                                          <p:attrName>style.visibility</p:attrName>
-                                        </p:attrNameLst>
-                                      </p:cBhvr>
-                                      <p:to>
-                                        <p:strVal val="visible"/>
-                                      </p:to>
-                                    </p:set>
-                                  </p:childTnLst>
-                                </p:cTn>
-                              </p:par>
-                            </p:childTnLst>
-                          </p:cTn>
-                        </p:par>
-                      </p:childTnLst>
-                    </p:cTn>
-                  </p:par>
-                  <p:par>
-                    <p:cTn fill="hold">
-                      <p:stCondLst>
-                        <p:cond delay="indefinite"/>
-                      </p:stCondLst>
-                      <p:childTnLst>
-                        <p:par>
-                          <p:cTn fill="hold">
-                            <p:stCondLst>
-                              <p:cond delay="0"/>
-                            </p:stCondLst>
-                            <p:childTnLst>
-                              <p:par>
-                                <p:cTn fill="hold" nodeType="clickEffect" presetClass="entr" presetID="1" presetSubtype="0">
-                                  <p:stCondLst>
-                                    <p:cond delay="0"/>
-                                  </p:stCondLst>
-                                  <p:childTnLst>
-                                    <p:set>
-                                      <p:cBhvr>
-                                        <p:cTn dur="1" fill="hold">
-                                          <p:stCondLst>
-                                            <p:cond delay="0"/>
-                                          </p:stCondLst>
-                                        </p:cTn>
-                                        <p:tgtEl>
-                                          <p:spTgt spid="355">
-                                            <p:txEl>
-                                              <p:pRg end="5" st="5"/>
-                                            </p:txEl>
-                                          </p:spTgt>
-                                        </p:tgtEl>
-                                        <p:attrNameLst>
-                                          <p:attrName>style.visibility</p:attrName>
-                                        </p:attrNameLst>
-                                      </p:cBhvr>
-                                      <p:to>
-                                        <p:strVal val="visible"/>
-                                      </p:to>
-                                    </p:set>
-                                  </p:childTnLst>
-                                </p:cTn>
-                              </p:par>
-                            </p:childTnLst>
-                          </p:cTn>
-                        </p:par>
-                      </p:childTnLst>
-                    </p:cTn>
-                  </p:par>
-                  <p:par>
-                    <p:cTn fill="hold">
-                      <p:stCondLst>
-                        <p:cond delay="indefinite"/>
-                      </p:stCondLst>
-                      <p:childTnLst>
-                        <p:par>
-                          <p:cTn fill="hold">
-                            <p:stCondLst>
-                              <p:cond delay="0"/>
-                            </p:stCondLst>
-                            <p:childTnLst>
-                              <p:par>
-                                <p:cTn fill="hold" nodeType="clickEffect" presetClass="entr" presetID="1" presetSubtype="0">
-                                  <p:stCondLst>
-                                    <p:cond delay="0"/>
-                                  </p:stCondLst>
-                                  <p:childTnLst>
-                                    <p:set>
-                                      <p:cBhvr>
-                                        <p:cTn dur="1" fill="hold">
-                                          <p:stCondLst>
-                                            <p:cond delay="0"/>
-                                          </p:stCondLst>
-                                        </p:cTn>
-                                        <p:tgtEl>
-                                          <p:spTgt spid="355">
-                                            <p:txEl>
-                                              <p:pRg end="6" st="6"/>
-                                            </p:txEl>
-                                          </p:spTgt>
-                                        </p:tgtEl>
-                                        <p:attrNameLst>
-                                          <p:attrName>style.visibility</p:attrName>
-                                        </p:attrNameLst>
-                                      </p:cBhvr>
-                                      <p:to>
-                                        <p:strVal val="visible"/>
-                                      </p:to>
-                                    </p:set>
-                                  </p:childTnLst>
-                                </p:cTn>
-                              </p:par>
-                            </p:childTnLst>
-                          </p:cTn>
-                        </p:par>
-                      </p:childTnLst>
-                    </p:cTn>
-                  </p:par>
-                  <p:par>
-                    <p:cTn fill="hold">
-                      <p:stCondLst>
-                        <p:cond delay="indefinite"/>
-                      </p:stCondLst>
-                      <p:childTnLst>
-                        <p:par>
-                          <p:cTn fill="hold">
-                            <p:stCondLst>
-                              <p:cond delay="0"/>
-                            </p:stCondLst>
-                            <p:childTnLst>
-                              <p:par>
-                                <p:cTn fill="hold" nodeType="clickEffect" presetClass="entr" presetID="1" presetSubtype="0">
-                                  <p:stCondLst>
-                                    <p:cond delay="0"/>
-                                  </p:stCondLst>
-                                  <p:childTnLst>
-                                    <p:set>
-                                      <p:cBhvr>
-                                        <p:cTn dur="1" fill="hold">
-                                          <p:stCondLst>
-                                            <p:cond delay="0"/>
-                                          </p:stCondLst>
-                                        </p:cTn>
-                                        <p:tgtEl>
-                                          <p:spTgt spid="355">
-                                            <p:txEl>
-                                              <p:pRg end="7" st="7"/>
-                                            </p:txEl>
-                                          </p:spTgt>
-                                        </p:tgtEl>
-                                        <p:attrNameLst>
-                                          <p:attrName>style.visibility</p:attrName>
-                                        </p:attrNameLst>
-                                      </p:cBhvr>
-                                      <p:to>
-                                        <p:strVal val="visible"/>
-                                      </p:to>
-                                    </p:set>
-                                  </p:childTnLst>
-                                </p:cTn>
-                              </p:par>
-                            </p:childTnLst>
-                          </p:cTn>
-                        </p:par>
-                      </p:childTnLst>
-                    </p:cTn>
-                  </p:par>
                   <p:par>
                     <p:cTn fill="hold">
                       <p:stCondLst>
@@ -30547,7 +30776,595 @@
                                           </p:stCondLst>
                                         </p:cTn>
                                         <p:tgtEl>
-                                          <p:spTgt spid="357"/>
+                                          <p:spTgt spid="357">
+                                            <p:txEl>
+                                              <p:pRg end="0" st="0"/>
+                                            </p:txEl>
+                                          </p:spTgt>
+                                        </p:tgtEl>
+                                        <p:attrNameLst>
+                                          <p:attrName>style.visibility</p:attrName>
+                                        </p:attrNameLst>
+                                      </p:cBhvr>
+                                      <p:to>
+                                        <p:strVal val="visible"/>
+                                      </p:to>
+                                    </p:set>
+                                  </p:childTnLst>
+                                </p:cTn>
+                              </p:par>
+                            </p:childTnLst>
+                          </p:cTn>
+                        </p:par>
+                      </p:childTnLst>
+                    </p:cTn>
+                  </p:par>
+                  <p:par>
+                    <p:cTn fill="hold">
+                      <p:stCondLst>
+                        <p:cond delay="indefinite"/>
+                      </p:stCondLst>
+                      <p:childTnLst>
+                        <p:par>
+                          <p:cTn fill="hold">
+                            <p:stCondLst>
+                              <p:cond delay="0"/>
+                            </p:stCondLst>
+                            <p:childTnLst>
+                              <p:par>
+                                <p:cTn fill="hold" nodeType="clickEffect" presetClass="entr" presetID="1" presetSubtype="0">
+                                  <p:stCondLst>
+                                    <p:cond delay="0"/>
+                                  </p:stCondLst>
+                                  <p:childTnLst>
+                                    <p:set>
+                                      <p:cBhvr>
+                                        <p:cTn dur="1" fill="hold">
+                                          <p:stCondLst>
+                                            <p:cond delay="0"/>
+                                          </p:stCondLst>
+                                        </p:cTn>
+                                        <p:tgtEl>
+                                          <p:spTgt spid="357">
+                                            <p:txEl>
+                                              <p:pRg end="1" st="1"/>
+                                            </p:txEl>
+                                          </p:spTgt>
+                                        </p:tgtEl>
+                                        <p:attrNameLst>
+                                          <p:attrName>style.visibility</p:attrName>
+                                        </p:attrNameLst>
+                                      </p:cBhvr>
+                                      <p:to>
+                                        <p:strVal val="visible"/>
+                                      </p:to>
+                                    </p:set>
+                                  </p:childTnLst>
+                                </p:cTn>
+                              </p:par>
+                            </p:childTnLst>
+                          </p:cTn>
+                        </p:par>
+                      </p:childTnLst>
+                    </p:cTn>
+                  </p:par>
+                  <p:par>
+                    <p:cTn fill="hold">
+                      <p:stCondLst>
+                        <p:cond delay="indefinite"/>
+                      </p:stCondLst>
+                      <p:childTnLst>
+                        <p:par>
+                          <p:cTn fill="hold">
+                            <p:stCondLst>
+                              <p:cond delay="0"/>
+                            </p:stCondLst>
+                            <p:childTnLst>
+                              <p:par>
+                                <p:cTn fill="hold" nodeType="clickEffect" presetClass="entr" presetID="1" presetSubtype="0">
+                                  <p:stCondLst>
+                                    <p:cond delay="0"/>
+                                  </p:stCondLst>
+                                  <p:childTnLst>
+                                    <p:set>
+                                      <p:cBhvr>
+                                        <p:cTn dur="1" fill="hold">
+                                          <p:stCondLst>
+                                            <p:cond delay="0"/>
+                                          </p:stCondLst>
+                                        </p:cTn>
+                                        <p:tgtEl>
+                                          <p:spTgt spid="357">
+                                            <p:txEl>
+                                              <p:pRg end="2" st="2"/>
+                                            </p:txEl>
+                                          </p:spTgt>
+                                        </p:tgtEl>
+                                        <p:attrNameLst>
+                                          <p:attrName>style.visibility</p:attrName>
+                                        </p:attrNameLst>
+                                      </p:cBhvr>
+                                      <p:to>
+                                        <p:strVal val="visible"/>
+                                      </p:to>
+                                    </p:set>
+                                  </p:childTnLst>
+                                </p:cTn>
+                              </p:par>
+                            </p:childTnLst>
+                          </p:cTn>
+                        </p:par>
+                      </p:childTnLst>
+                    </p:cTn>
+                  </p:par>
+                  <p:par>
+                    <p:cTn fill="hold">
+                      <p:stCondLst>
+                        <p:cond delay="indefinite"/>
+                      </p:stCondLst>
+                      <p:childTnLst>
+                        <p:par>
+                          <p:cTn fill="hold">
+                            <p:stCondLst>
+                              <p:cond delay="0"/>
+                            </p:stCondLst>
+                            <p:childTnLst>
+                              <p:par>
+                                <p:cTn fill="hold" nodeType="clickEffect" presetClass="entr" presetID="1" presetSubtype="0">
+                                  <p:stCondLst>
+                                    <p:cond delay="0"/>
+                                  </p:stCondLst>
+                                  <p:childTnLst>
+                                    <p:set>
+                                      <p:cBhvr>
+                                        <p:cTn dur="1" fill="hold">
+                                          <p:stCondLst>
+                                            <p:cond delay="0"/>
+                                          </p:stCondLst>
+                                        </p:cTn>
+                                        <p:tgtEl>
+                                          <p:spTgt spid="357">
+                                            <p:txEl>
+                                              <p:pRg end="3" st="3"/>
+                                            </p:txEl>
+                                          </p:spTgt>
+                                        </p:tgtEl>
+                                        <p:attrNameLst>
+                                          <p:attrName>style.visibility</p:attrName>
+                                        </p:attrNameLst>
+                                      </p:cBhvr>
+                                      <p:to>
+                                        <p:strVal val="visible"/>
+                                      </p:to>
+                                    </p:set>
+                                  </p:childTnLst>
+                                </p:cTn>
+                              </p:par>
+                            </p:childTnLst>
+                          </p:cTn>
+                        </p:par>
+                      </p:childTnLst>
+                    </p:cTn>
+                  </p:par>
+                  <p:par>
+                    <p:cTn fill="hold">
+                      <p:stCondLst>
+                        <p:cond delay="indefinite"/>
+                      </p:stCondLst>
+                      <p:childTnLst>
+                        <p:par>
+                          <p:cTn fill="hold">
+                            <p:stCondLst>
+                              <p:cond delay="0"/>
+                            </p:stCondLst>
+                            <p:childTnLst>
+                              <p:par>
+                                <p:cTn fill="hold" nodeType="clickEffect" presetClass="entr" presetID="1" presetSubtype="0">
+                                  <p:stCondLst>
+                                    <p:cond delay="0"/>
+                                  </p:stCondLst>
+                                  <p:childTnLst>
+                                    <p:set>
+                                      <p:cBhvr>
+                                        <p:cTn dur="1" fill="hold">
+                                          <p:stCondLst>
+                                            <p:cond delay="0"/>
+                                          </p:stCondLst>
+                                        </p:cTn>
+                                        <p:tgtEl>
+                                          <p:spTgt spid="357">
+                                            <p:txEl>
+                                              <p:pRg end="4" st="4"/>
+                                            </p:txEl>
+                                          </p:spTgt>
+                                        </p:tgtEl>
+                                        <p:attrNameLst>
+                                          <p:attrName>style.visibility</p:attrName>
+                                        </p:attrNameLst>
+                                      </p:cBhvr>
+                                      <p:to>
+                                        <p:strVal val="visible"/>
+                                      </p:to>
+                                    </p:set>
+                                  </p:childTnLst>
+                                </p:cTn>
+                              </p:par>
+                            </p:childTnLst>
+                          </p:cTn>
+                        </p:par>
+                      </p:childTnLst>
+                    </p:cTn>
+                  </p:par>
+                  <p:par>
+                    <p:cTn fill="hold">
+                      <p:stCondLst>
+                        <p:cond delay="indefinite"/>
+                      </p:stCondLst>
+                      <p:childTnLst>
+                        <p:par>
+                          <p:cTn fill="hold">
+                            <p:stCondLst>
+                              <p:cond delay="0"/>
+                            </p:stCondLst>
+                            <p:childTnLst>
+                              <p:par>
+                                <p:cTn fill="hold" nodeType="clickEffect" presetClass="entr" presetID="1" presetSubtype="0">
+                                  <p:stCondLst>
+                                    <p:cond delay="0"/>
+                                  </p:stCondLst>
+                                  <p:childTnLst>
+                                    <p:set>
+                                      <p:cBhvr>
+                                        <p:cTn dur="1" fill="hold">
+                                          <p:stCondLst>
+                                            <p:cond delay="0"/>
+                                          </p:stCondLst>
+                                        </p:cTn>
+                                        <p:tgtEl>
+                                          <p:spTgt spid="357">
+                                            <p:txEl>
+                                              <p:pRg end="5" st="5"/>
+                                            </p:txEl>
+                                          </p:spTgt>
+                                        </p:tgtEl>
+                                        <p:attrNameLst>
+                                          <p:attrName>style.visibility</p:attrName>
+                                        </p:attrNameLst>
+                                      </p:cBhvr>
+                                      <p:to>
+                                        <p:strVal val="visible"/>
+                                      </p:to>
+                                    </p:set>
+                                  </p:childTnLst>
+                                </p:cTn>
+                              </p:par>
+                            </p:childTnLst>
+                          </p:cTn>
+                        </p:par>
+                      </p:childTnLst>
+                    </p:cTn>
+                  </p:par>
+                  <p:par>
+                    <p:cTn fill="hold">
+                      <p:stCondLst>
+                        <p:cond delay="indefinite"/>
+                      </p:stCondLst>
+                      <p:childTnLst>
+                        <p:par>
+                          <p:cTn fill="hold">
+                            <p:stCondLst>
+                              <p:cond delay="0"/>
+                            </p:stCondLst>
+                            <p:childTnLst>
+                              <p:par>
+                                <p:cTn fill="hold" nodeType="clickEffect" presetClass="entr" presetID="1" presetSubtype="0">
+                                  <p:stCondLst>
+                                    <p:cond delay="0"/>
+                                  </p:stCondLst>
+                                  <p:childTnLst>
+                                    <p:set>
+                                      <p:cBhvr>
+                                        <p:cTn dur="1" fill="hold">
+                                          <p:stCondLst>
+                                            <p:cond delay="0"/>
+                                          </p:stCondLst>
+                                        </p:cTn>
+                                        <p:tgtEl>
+                                          <p:spTgt spid="357">
+                                            <p:txEl>
+                                              <p:pRg end="6" st="6"/>
+                                            </p:txEl>
+                                          </p:spTgt>
+                                        </p:tgtEl>
+                                        <p:attrNameLst>
+                                          <p:attrName>style.visibility</p:attrName>
+                                        </p:attrNameLst>
+                                      </p:cBhvr>
+                                      <p:to>
+                                        <p:strVal val="visible"/>
+                                      </p:to>
+                                    </p:set>
+                                  </p:childTnLst>
+                                </p:cTn>
+                              </p:par>
+                            </p:childTnLst>
+                          </p:cTn>
+                        </p:par>
+                      </p:childTnLst>
+                    </p:cTn>
+                  </p:par>
+                  <p:par>
+                    <p:cTn fill="hold">
+                      <p:stCondLst>
+                        <p:cond delay="indefinite"/>
+                      </p:stCondLst>
+                      <p:childTnLst>
+                        <p:par>
+                          <p:cTn fill="hold">
+                            <p:stCondLst>
+                              <p:cond delay="0"/>
+                            </p:stCondLst>
+                            <p:childTnLst>
+                              <p:par>
+                                <p:cTn fill="hold" nodeType="clickEffect" presetClass="entr" presetID="1" presetSubtype="0">
+                                  <p:stCondLst>
+                                    <p:cond delay="0"/>
+                                  </p:stCondLst>
+                                  <p:childTnLst>
+                                    <p:set>
+                                      <p:cBhvr>
+                                        <p:cTn dur="1" fill="hold">
+                                          <p:stCondLst>
+                                            <p:cond delay="0"/>
+                                          </p:stCondLst>
+                                        </p:cTn>
+                                        <p:tgtEl>
+                                          <p:spTgt spid="357">
+                                            <p:txEl>
+                                              <p:pRg end="7" st="7"/>
+                                            </p:txEl>
+                                          </p:spTgt>
+                                        </p:tgtEl>
+                                        <p:attrNameLst>
+                                          <p:attrName>style.visibility</p:attrName>
+                                        </p:attrNameLst>
+                                      </p:cBhvr>
+                                      <p:to>
+                                        <p:strVal val="visible"/>
+                                      </p:to>
+                                    </p:set>
+                                  </p:childTnLst>
+                                </p:cTn>
+                              </p:par>
+                            </p:childTnLst>
+                          </p:cTn>
+                        </p:par>
+                      </p:childTnLst>
+                    </p:cTn>
+                  </p:par>
+                  <p:par>
+                    <p:cTn fill="hold">
+                      <p:stCondLst>
+                        <p:cond delay="indefinite"/>
+                      </p:stCondLst>
+                      <p:childTnLst>
+                        <p:par>
+                          <p:cTn fill="hold">
+                            <p:stCondLst>
+                              <p:cond delay="0"/>
+                            </p:stCondLst>
+                            <p:childTnLst>
+                              <p:par>
+                                <p:cTn fill="hold" nodeType="clickEffect" presetClass="entr" presetID="1" presetSubtype="0">
+                                  <p:stCondLst>
+                                    <p:cond delay="0"/>
+                                  </p:stCondLst>
+                                  <p:childTnLst>
+                                    <p:set>
+                                      <p:cBhvr>
+                                        <p:cTn dur="1" fill="hold">
+                                          <p:stCondLst>
+                                            <p:cond delay="0"/>
+                                          </p:stCondLst>
+                                        </p:cTn>
+                                        <p:tgtEl>
+                                          <p:spTgt spid="357">
+                                            <p:txEl>
+                                              <p:pRg end="8" st="8"/>
+                                            </p:txEl>
+                                          </p:spTgt>
+                                        </p:tgtEl>
+                                        <p:attrNameLst>
+                                          <p:attrName>style.visibility</p:attrName>
+                                        </p:attrNameLst>
+                                      </p:cBhvr>
+                                      <p:to>
+                                        <p:strVal val="visible"/>
+                                      </p:to>
+                                    </p:set>
+                                  </p:childTnLst>
+                                </p:cTn>
+                              </p:par>
+                            </p:childTnLst>
+                          </p:cTn>
+                        </p:par>
+                      </p:childTnLst>
+                    </p:cTn>
+                  </p:par>
+                  <p:par>
+                    <p:cTn fill="hold">
+                      <p:stCondLst>
+                        <p:cond delay="indefinite"/>
+                      </p:stCondLst>
+                      <p:childTnLst>
+                        <p:par>
+                          <p:cTn fill="hold">
+                            <p:stCondLst>
+                              <p:cond delay="0"/>
+                            </p:stCondLst>
+                            <p:childTnLst>
+                              <p:par>
+                                <p:cTn fill="hold" nodeType="clickEffect" presetClass="entr" presetID="1" presetSubtype="0">
+                                  <p:stCondLst>
+                                    <p:cond delay="0"/>
+                                  </p:stCondLst>
+                                  <p:childTnLst>
+                                    <p:set>
+                                      <p:cBhvr>
+                                        <p:cTn dur="1" fill="hold">
+                                          <p:stCondLst>
+                                            <p:cond delay="0"/>
+                                          </p:stCondLst>
+                                        </p:cTn>
+                                        <p:tgtEl>
+                                          <p:spTgt spid="357">
+                                            <p:txEl>
+                                              <p:pRg end="9" st="9"/>
+                                            </p:txEl>
+                                          </p:spTgt>
+                                        </p:tgtEl>
+                                        <p:attrNameLst>
+                                          <p:attrName>style.visibility</p:attrName>
+                                        </p:attrNameLst>
+                                      </p:cBhvr>
+                                      <p:to>
+                                        <p:strVal val="visible"/>
+                                      </p:to>
+                                    </p:set>
+                                  </p:childTnLst>
+                                </p:cTn>
+                              </p:par>
+                            </p:childTnLst>
+                          </p:cTn>
+                        </p:par>
+                      </p:childTnLst>
+                    </p:cTn>
+                  </p:par>
+                  <p:par>
+                    <p:cTn fill="hold">
+                      <p:stCondLst>
+                        <p:cond delay="indefinite"/>
+                      </p:stCondLst>
+                      <p:childTnLst>
+                        <p:par>
+                          <p:cTn fill="hold">
+                            <p:stCondLst>
+                              <p:cond delay="0"/>
+                            </p:stCondLst>
+                            <p:childTnLst>
+                              <p:par>
+                                <p:cTn fill="hold" nodeType="clickEffect" presetClass="entr" presetID="1" presetSubtype="0">
+                                  <p:stCondLst>
+                                    <p:cond delay="0"/>
+                                  </p:stCondLst>
+                                  <p:childTnLst>
+                                    <p:set>
+                                      <p:cBhvr>
+                                        <p:cTn dur="1" fill="hold">
+                                          <p:stCondLst>
+                                            <p:cond delay="0"/>
+                                          </p:stCondLst>
+                                        </p:cTn>
+                                        <p:tgtEl>
+                                          <p:spTgt spid="357">
+                                            <p:txEl>
+                                              <p:pRg end="10" st="10"/>
+                                            </p:txEl>
+                                          </p:spTgt>
+                                        </p:tgtEl>
+                                        <p:attrNameLst>
+                                          <p:attrName>style.visibility</p:attrName>
+                                        </p:attrNameLst>
+                                      </p:cBhvr>
+                                      <p:to>
+                                        <p:strVal val="visible"/>
+                                      </p:to>
+                                    </p:set>
+                                  </p:childTnLst>
+                                </p:cTn>
+                              </p:par>
+                            </p:childTnLst>
+                          </p:cTn>
+                        </p:par>
+                      </p:childTnLst>
+                    </p:cTn>
+                  </p:par>
+                  <p:par>
+                    <p:cTn fill="hold">
+                      <p:stCondLst>
+                        <p:cond delay="indefinite"/>
+                      </p:stCondLst>
+                      <p:childTnLst>
+                        <p:par>
+                          <p:cTn fill="hold">
+                            <p:stCondLst>
+                              <p:cond delay="0"/>
+                            </p:stCondLst>
+                            <p:childTnLst>
+                              <p:par>
+                                <p:cTn fill="hold" nodeType="clickEffect" presetClass="entr" presetID="1" presetSubtype="0">
+                                  <p:stCondLst>
+                                    <p:cond delay="0"/>
+                                  </p:stCondLst>
+                                  <p:childTnLst>
+                                    <p:set>
+                                      <p:cBhvr>
+                                        <p:cTn dur="1" fill="hold">
+                                          <p:stCondLst>
+                                            <p:cond delay="0"/>
+                                          </p:stCondLst>
+                                        </p:cTn>
+                                        <p:tgtEl>
+                                          <p:spTgt spid="357">
+                                            <p:txEl>
+                                              <p:pRg end="11" st="11"/>
+                                            </p:txEl>
+                                          </p:spTgt>
+                                        </p:tgtEl>
+                                        <p:attrNameLst>
+                                          <p:attrName>style.visibility</p:attrName>
+                                        </p:attrNameLst>
+                                      </p:cBhvr>
+                                      <p:to>
+                                        <p:strVal val="visible"/>
+                                      </p:to>
+                                    </p:set>
+                                  </p:childTnLst>
+                                </p:cTn>
+                              </p:par>
+                            </p:childTnLst>
+                          </p:cTn>
+                        </p:par>
+                      </p:childTnLst>
+                    </p:cTn>
+                  </p:par>
+                  <p:par>
+                    <p:cTn fill="hold">
+                      <p:stCondLst>
+                        <p:cond delay="indefinite"/>
+                      </p:stCondLst>
+                      <p:childTnLst>
+                        <p:par>
+                          <p:cTn fill="hold">
+                            <p:stCondLst>
+                              <p:cond delay="0"/>
+                            </p:stCondLst>
+                            <p:childTnLst>
+                              <p:par>
+                                <p:cTn fill="hold" nodeType="clickEffect" presetClass="entr" presetID="1" presetSubtype="0">
+                                  <p:stCondLst>
+                                    <p:cond delay="0"/>
+                                  </p:stCondLst>
+                                  <p:childTnLst>
+                                    <p:set>
+                                      <p:cBhvr>
+                                        <p:cTn dur="1" fill="hold">
+                                          <p:stCondLst>
+                                            <p:cond delay="0"/>
+                                          </p:stCondLst>
+                                        </p:cTn>
+                                        <p:tgtEl>
+                                          <p:spTgt spid="358"/>
                                         </p:tgtEl>
                                         <p:attrNameLst>
                                           <p:attrName>style.visibility</p:attrName>
